--- a/data/deep_dives/carteira_fidc_solfacil_vi_b45c4038/exports/documentary_comparison.pptx
+++ b/data/deep_dives/carteira_fidc_solfacil_vi_b45c4038/exports/documentary_comparison.pptx
@@ -4281,7 +4281,7 @@
                       <a:r>
                         <a:rPr sz="1300" b="1">
                           <a:solidFill>
-                            <a:srgbClr val="1F1F1F"/>
+                            <a:srgbClr val="FFFFFF"/>
                           </a:solidFill>
                           <a:latin typeface="Calibri"/>
                         </a:rPr>
@@ -4291,7 +4291,7 @@
                   </a:txBody>
                   <a:tcPr marL="91440" marR="91440" marT="41148" marB="41148" anchor="ctr">
                     <a:solidFill>
-                      <a:srgbClr val="EC7000"/>
+                      <a:srgbClr val="FF6200"/>
                     </a:solidFill>
                     <a:lnL>
                       <a:noFill/>
@@ -4330,7 +4330,7 @@
                       <a:r>
                         <a:rPr sz="1300" b="1">
                           <a:solidFill>
-                            <a:srgbClr val="1F1F1F"/>
+                            <a:srgbClr val="FFFFFF"/>
                           </a:solidFill>
                           <a:latin typeface="Calibri"/>
                         </a:rPr>
@@ -4340,7 +4340,7 @@
                   </a:txBody>
                   <a:tcPr marL="91440" marR="91440" marT="41148" marB="41148" anchor="ctr">
                     <a:solidFill>
-                      <a:srgbClr val="EC7000"/>
+                      <a:srgbClr val="FF6200"/>
                     </a:solidFill>
                     <a:lnL>
                       <a:noFill/>
@@ -5206,7 +5206,7 @@
                       <a:r>
                         <a:rPr sz="1300" b="1">
                           <a:solidFill>
-                            <a:srgbClr val="1F1F1F"/>
+                            <a:srgbClr val="FFFFFF"/>
                           </a:solidFill>
                           <a:latin typeface="Calibri"/>
                         </a:rPr>
@@ -5216,7 +5216,7 @@
                   </a:txBody>
                   <a:tcPr marL="91440" marR="91440" marT="41148" marB="41148" anchor="ctr">
                     <a:solidFill>
-                      <a:srgbClr val="EC7000"/>
+                      <a:srgbClr val="FF6200"/>
                     </a:solidFill>
                     <a:lnL>
                       <a:noFill/>
@@ -5255,7 +5255,7 @@
                       <a:r>
                         <a:rPr sz="1300" b="1">
                           <a:solidFill>
-                            <a:srgbClr val="1F1F1F"/>
+                            <a:srgbClr val="FFFFFF"/>
                           </a:solidFill>
                           <a:latin typeface="Calibri"/>
                         </a:rPr>
@@ -5265,7 +5265,7 @@
                   </a:txBody>
                   <a:tcPr marL="91440" marR="91440" marT="41148" marB="41148" anchor="ctr">
                     <a:solidFill>
-                      <a:srgbClr val="EC7000"/>
+                      <a:srgbClr val="FF6200"/>
                     </a:solidFill>
                     <a:lnL>
                       <a:noFill/>
@@ -5831,7 +5831,7 @@
                           </a:solidFill>
                           <a:latin typeface="Calibri"/>
                         </a:rPr>
-                        <a:t>Política de provisão em anexo; faixa por atraso e renegociação exige aplicação ao contrato.</a:t>
+                        <a:t>faixa por atraso e renegociação exige aplicação ao contrato.</a:t>
                       </a:r>
                     </a:p>
                   </a:txBody>
@@ -6035,7 +6035,7 @@
                       <a:r>
                         <a:rPr sz="1300" b="1">
                           <a:solidFill>
-                            <a:srgbClr val="1F1F1F"/>
+                            <a:srgbClr val="FFFFFF"/>
                           </a:solidFill>
                           <a:latin typeface="Calibri"/>
                         </a:rPr>
@@ -6045,7 +6045,7 @@
                   </a:txBody>
                   <a:tcPr marL="91440" marR="91440" marT="41148" marB="41148" anchor="ctr">
                     <a:solidFill>
-                      <a:srgbClr val="EC7000"/>
+                      <a:srgbClr val="FF6200"/>
                     </a:solidFill>
                     <a:lnL>
                       <a:noFill/>
@@ -6084,7 +6084,7 @@
                       <a:r>
                         <a:rPr sz="1300" b="1">
                           <a:solidFill>
-                            <a:srgbClr val="1F1F1F"/>
+                            <a:srgbClr val="FFFFFF"/>
                           </a:solidFill>
                           <a:latin typeface="Calibri"/>
                         </a:rPr>
@@ -6094,7 +6094,7 @@
                   </a:txBody>
                   <a:tcPr marL="91440" marR="91440" marT="41148" marB="41148" anchor="ctr">
                     <a:solidFill>
-                      <a:srgbClr val="EC7000"/>
+                      <a:srgbClr val="FF6200"/>
                     </a:solidFill>
                     <a:lnL>
                       <a:noFill/>
@@ -6378,7 +6378,7 @@
                           </a:solidFill>
                           <a:latin typeface="Calibri"/>
                         </a:rPr>
-                        <a:t>Classe fechada; prazos e remuneração de séries nos apêndices; investidores autorizados.</a:t>
+                        <a:t>Classe fechada; investidores autorizados.</a:t>
                       </a:r>
                     </a:p>
                   </a:txBody>
@@ -6868,6 +6868,1771 @@
                 <a:latin typeface="Calibri"/>
               </a:rPr>
               <a:t>Curadoria FIDC Solfacil VI – Emissões e remuneração</a:t>
+            </a:r>
+          </a:p>
+        </p:txBody>
+      </p:sp>
+      <p:graphicFrame>
+        <p:nvGraphicFramePr>
+          <p:cNvPr id="3" name="Table 2"/>
+          <p:cNvGraphicFramePr>
+            <a:graphicFrameLocks noGrp="1"/>
+          </p:cNvGraphicFramePr>
+          <p:nvPr/>
+        </p:nvGraphicFramePr>
+        <p:xfrm>
+          <a:off x="438912" y="932688"/>
+          <a:ext cx="11313871" cy="1714500"/>
+        </p:xfrm>
+        <a:graphic>
+          <a:graphicData uri="http://schemas.openxmlformats.org/drawingml/2006/table">
+            <a:tbl>
+              <a:tblPr>
+                <a:tableStyleId>{5C22544A-7EE6-4342-B048-85BDC9FD1C3A}</a:tableStyleId>
+              </a:tblPr>
+              <a:tblGrid>
+                <a:gridCol w="2331720"/>
+                <a:gridCol w="8982151"/>
+              </a:tblGrid>
+              <a:tr h="393192">
+                <a:tc>
+                  <a:txBody>
+                    <a:bodyPr wrap="square">
+                      <a:noAutofit/>
+                    </a:bodyPr>
+                    <a:lstStyle/>
+                    <a:p>
+                      <a:pPr algn="l">
+                        <a:lnSpc>
+                          <a:spcPct val="100000"/>
+                        </a:lnSpc>
+                        <a:spcBef>
+                          <a:spcPts val="0"/>
+                        </a:spcBef>
+                        <a:spcAft>
+                          <a:spcPts val="0"/>
+                        </a:spcAft>
+                      </a:pPr>
+                      <a:r>
+                        <a:rPr sz="1300" b="1">
+                          <a:solidFill>
+                            <a:srgbClr val="FFFFFF"/>
+                          </a:solidFill>
+                          <a:latin typeface="Calibri"/>
+                        </a:rPr>
+                        <a:t>Critério</a:t>
+                      </a:r>
+                    </a:p>
+                  </a:txBody>
+                  <a:tcPr marL="91440" marR="91440" marT="41148" marB="41148" anchor="ctr">
+                    <a:solidFill>
+                      <a:srgbClr val="FF6200"/>
+                    </a:solidFill>
+                    <a:lnL>
+                      <a:noFill/>
+                    </a:lnL>
+                    <a:lnR>
+                      <a:noFill/>
+                    </a:lnR>
+                    <a:lnT>
+                      <a:noFill/>
+                    </a:lnT>
+                    <a:lnB w="6350">
+                      <a:solidFill>
+                        <a:srgbClr val="D9DEE5"/>
+                      </a:solidFill>
+                    </a:lnB>
+                  </a:tcPr>
+                </a:tc>
+                <a:tc>
+                  <a:txBody>
+                    <a:bodyPr wrap="square">
+                      <a:noAutofit/>
+                    </a:bodyPr>
+                    <a:lstStyle/>
+                    <a:p>
+                      <a:pPr algn="ctr">
+                        <a:lnSpc>
+                          <a:spcPct val="100000"/>
+                        </a:lnSpc>
+                        <a:spcBef>
+                          <a:spcPts val="0"/>
+                        </a:spcBef>
+                        <a:spcAft>
+                          <a:spcPts val="0"/>
+                        </a:spcAft>
+                      </a:pPr>
+                      <a:r>
+                        <a:rPr sz="1300" b="1">
+                          <a:solidFill>
+                            <a:srgbClr val="FFFFFF"/>
+                          </a:solidFill>
+                          <a:latin typeface="Calibri"/>
+                        </a:rPr>
+                        <a:t>Solfácil VI</a:t>
+                      </a:r>
+                    </a:p>
+                  </a:txBody>
+                  <a:tcPr marL="91440" marR="91440" marT="41148" marB="41148" anchor="ctr">
+                    <a:solidFill>
+                      <a:srgbClr val="FF6200"/>
+                    </a:solidFill>
+                    <a:lnL>
+                      <a:noFill/>
+                    </a:lnL>
+                    <a:lnR>
+                      <a:noFill/>
+                    </a:lnR>
+                    <a:lnT>
+                      <a:noFill/>
+                    </a:lnT>
+                    <a:lnB w="6350">
+                      <a:solidFill>
+                        <a:srgbClr val="D9DEE5"/>
+                      </a:solidFill>
+                    </a:lnB>
+                  </a:tcPr>
+                </a:tc>
+              </a:tr>
+              <a:tr h="470916">
+                <a:tc>
+                  <a:txBody>
+                    <a:bodyPr wrap="square">
+                      <a:noAutofit/>
+                    </a:bodyPr>
+                    <a:lstStyle/>
+                    <a:p>
+                      <a:pPr algn="l">
+                        <a:lnSpc>
+                          <a:spcPct val="100000"/>
+                        </a:lnSpc>
+                        <a:spcBef>
+                          <a:spcPts val="0"/>
+                        </a:spcBef>
+                        <a:spcAft>
+                          <a:spcPts val="0"/>
+                        </a:spcAft>
+                      </a:pPr>
+                      <a:r>
+                        <a:rPr sz="1300" b="1">
+                          <a:solidFill>
+                            <a:srgbClr val="1F1F1F"/>
+                          </a:solidFill>
+                          <a:latin typeface="Calibri"/>
+                        </a:rPr>
+                        <a:t>Classes/séries</a:t>
+                      </a:r>
+                    </a:p>
+                  </a:txBody>
+                  <a:tcPr marL="91440" marR="91440" marT="41148" marB="41148" anchor="ctr">
+                    <a:solidFill>
+                      <a:srgbClr val="FFFFFF"/>
+                    </a:solidFill>
+                    <a:lnL>
+                      <a:noFill/>
+                    </a:lnL>
+                    <a:lnR>
+                      <a:noFill/>
+                    </a:lnR>
+                    <a:lnT>
+                      <a:noFill/>
+                    </a:lnT>
+                    <a:lnB>
+                      <a:noFill/>
+                    </a:lnB>
+                  </a:tcPr>
+                </a:tc>
+                <a:tc>
+                  <a:txBody>
+                    <a:bodyPr wrap="square">
+                      <a:noAutofit/>
+                    </a:bodyPr>
+                    <a:lstStyle/>
+                    <a:p>
+                      <a:pPr algn="ctr">
+                        <a:lnSpc>
+                          <a:spcPct val="100000"/>
+                        </a:lnSpc>
+                        <a:spcBef>
+                          <a:spcPts val="0"/>
+                        </a:spcBef>
+                        <a:spcAft>
+                          <a:spcPts val="0"/>
+                        </a:spcAft>
+                      </a:pPr>
+                      <a:r>
+                        <a:rPr sz="1300" b="0">
+                          <a:solidFill>
+                            <a:srgbClr val="1F1F1F"/>
+                          </a:solidFill>
+                          <a:latin typeface="Calibri"/>
+                        </a:rPr>
+                        <a:t>Sênior, subordinadas mezanino e júnior; modelos de emissão não comprovam todas as séries em</a:t>
+                      </a:r>
+                    </a:p>
+                    <a:p>
+                      <a:pPr algn="ctr">
+                        <a:lnSpc>
+                          <a:spcPct val="100000"/>
+                        </a:lnSpc>
+                        <a:spcBef>
+                          <a:spcPts val="0"/>
+                        </a:spcBef>
+                        <a:spcAft>
+                          <a:spcPts val="0"/>
+                        </a:spcAft>
+                      </a:pPr>
+                      <a:r>
+                        <a:rPr sz="1300" b="0">
+                          <a:solidFill>
+                            <a:srgbClr val="1F1F1F"/>
+                          </a:solidFill>
+                          <a:latin typeface="Calibri"/>
+                        </a:rPr>
+                        <a:t>circulação.</a:t>
+                      </a:r>
+                    </a:p>
+                  </a:txBody>
+                  <a:tcPr marL="91440" marR="91440" marT="41148" marB="41148" anchor="ctr">
+                    <a:solidFill>
+                      <a:srgbClr val="FFFFFF"/>
+                    </a:solidFill>
+                    <a:lnL>
+                      <a:noFill/>
+                    </a:lnL>
+                    <a:lnR>
+                      <a:noFill/>
+                    </a:lnR>
+                    <a:lnT>
+                      <a:noFill/>
+                    </a:lnT>
+                    <a:lnB>
+                      <a:noFill/>
+                    </a:lnB>
+                  </a:tcPr>
+                </a:tc>
+              </a:tr>
+              <a:tr h="283464">
+                <a:tc>
+                  <a:txBody>
+                    <a:bodyPr wrap="square">
+                      <a:noAutofit/>
+                    </a:bodyPr>
+                    <a:lstStyle/>
+                    <a:p>
+                      <a:pPr algn="l">
+                        <a:lnSpc>
+                          <a:spcPct val="100000"/>
+                        </a:lnSpc>
+                        <a:spcBef>
+                          <a:spcPts val="0"/>
+                        </a:spcBef>
+                        <a:spcAft>
+                          <a:spcPts val="0"/>
+                        </a:spcAft>
+                      </a:pPr>
+                      <a:r>
+                        <a:rPr sz="1300" b="1">
+                          <a:solidFill>
+                            <a:srgbClr val="1F1F1F"/>
+                          </a:solidFill>
+                          <a:latin typeface="Calibri"/>
+                        </a:rPr>
+                        <a:t>Remuneração</a:t>
+                      </a:r>
+                    </a:p>
+                  </a:txBody>
+                  <a:tcPr marL="91440" marR="91440" marT="41148" marB="41148" anchor="ctr">
+                    <a:solidFill>
+                      <a:srgbClr val="FFFFFF"/>
+                    </a:solidFill>
+                    <a:lnL>
+                      <a:noFill/>
+                    </a:lnL>
+                    <a:lnR>
+                      <a:noFill/>
+                    </a:lnR>
+                    <a:lnT>
+                      <a:noFill/>
+                    </a:lnT>
+                    <a:lnB>
+                      <a:noFill/>
+                    </a:lnB>
+                  </a:tcPr>
+                </a:tc>
+                <a:tc>
+                  <a:txBody>
+                    <a:bodyPr wrap="square">
+                      <a:noAutofit/>
+                    </a:bodyPr>
+                    <a:lstStyle/>
+                    <a:p>
+                      <a:pPr algn="ctr">
+                        <a:lnSpc>
+                          <a:spcPct val="100000"/>
+                        </a:lnSpc>
+                        <a:spcBef>
+                          <a:spcPts val="0"/>
+                        </a:spcBef>
+                        <a:spcAft>
+                          <a:spcPts val="0"/>
+                        </a:spcAft>
+                      </a:pPr>
+                      <a:r>
+                        <a:rPr sz="1300" b="0">
+                          <a:solidFill>
+                            <a:srgbClr val="1F1F1F"/>
+                          </a:solidFill>
+                          <a:latin typeface="Calibri"/>
+                        </a:rPr>
+                        <a:t>-</a:t>
+                      </a:r>
+                    </a:p>
+                  </a:txBody>
+                  <a:tcPr marL="91440" marR="91440" marT="41148" marB="41148" anchor="ctr">
+                    <a:solidFill>
+                      <a:srgbClr val="FFFFFF"/>
+                    </a:solidFill>
+                    <a:lnL>
+                      <a:noFill/>
+                    </a:lnL>
+                    <a:lnR>
+                      <a:noFill/>
+                    </a:lnR>
+                    <a:lnT>
+                      <a:noFill/>
+                    </a:lnT>
+                    <a:lnB>
+                      <a:noFill/>
+                    </a:lnB>
+                  </a:tcPr>
+                </a:tc>
+              </a:tr>
+              <a:tr h="283464">
+                <a:tc>
+                  <a:txBody>
+                    <a:bodyPr wrap="square">
+                      <a:noAutofit/>
+                    </a:bodyPr>
+                    <a:lstStyle/>
+                    <a:p>
+                      <a:pPr algn="l">
+                        <a:lnSpc>
+                          <a:spcPct val="100000"/>
+                        </a:lnSpc>
+                        <a:spcBef>
+                          <a:spcPts val="0"/>
+                        </a:spcBef>
+                        <a:spcAft>
+                          <a:spcPts val="0"/>
+                        </a:spcAft>
+                      </a:pPr>
+                      <a:r>
+                        <a:rPr sz="1300" b="1">
+                          <a:solidFill>
+                            <a:srgbClr val="1F1F1F"/>
+                          </a:solidFill>
+                          <a:latin typeface="Calibri"/>
+                        </a:rPr>
+                        <a:t>Volume/VNU</a:t>
+                      </a:r>
+                    </a:p>
+                  </a:txBody>
+                  <a:tcPr marL="91440" marR="91440" marT="41148" marB="41148" anchor="ctr">
+                    <a:solidFill>
+                      <a:srgbClr val="FFFFFF"/>
+                    </a:solidFill>
+                    <a:lnL>
+                      <a:noFill/>
+                    </a:lnL>
+                    <a:lnR>
+                      <a:noFill/>
+                    </a:lnR>
+                    <a:lnT>
+                      <a:noFill/>
+                    </a:lnT>
+                    <a:lnB>
+                      <a:noFill/>
+                    </a:lnB>
+                  </a:tcPr>
+                </a:tc>
+                <a:tc>
+                  <a:txBody>
+                    <a:bodyPr wrap="square">
+                      <a:noAutofit/>
+                    </a:bodyPr>
+                    <a:lstStyle/>
+                    <a:p>
+                      <a:pPr algn="ctr">
+                        <a:lnSpc>
+                          <a:spcPct val="100000"/>
+                        </a:lnSpc>
+                        <a:spcBef>
+                          <a:spcPts val="0"/>
+                        </a:spcBef>
+                        <a:spcAft>
+                          <a:spcPts val="0"/>
+                        </a:spcAft>
+                      </a:pPr>
+                      <a:r>
+                        <a:rPr sz="1300" b="0">
+                          <a:solidFill>
+                            <a:srgbClr val="1F1F1F"/>
+                          </a:solidFill>
+                          <a:latin typeface="Calibri"/>
+                        </a:rPr>
+                        <a:t>-</a:t>
+                      </a:r>
+                    </a:p>
+                  </a:txBody>
+                  <a:tcPr marL="91440" marR="91440" marT="41148" marB="41148" anchor="ctr">
+                    <a:solidFill>
+                      <a:srgbClr val="FFFFFF"/>
+                    </a:solidFill>
+                    <a:lnL>
+                      <a:noFill/>
+                    </a:lnL>
+                    <a:lnR>
+                      <a:noFill/>
+                    </a:lnR>
+                    <a:lnT>
+                      <a:noFill/>
+                    </a:lnT>
+                    <a:lnB>
+                      <a:noFill/>
+                    </a:lnB>
+                  </a:tcPr>
+                </a:tc>
+              </a:tr>
+              <a:tr h="283464">
+                <a:tc>
+                  <a:txBody>
+                    <a:bodyPr wrap="square">
+                      <a:noAutofit/>
+                    </a:bodyPr>
+                    <a:lstStyle/>
+                    <a:p>
+                      <a:pPr algn="l">
+                        <a:lnSpc>
+                          <a:spcPct val="100000"/>
+                        </a:lnSpc>
+                        <a:spcBef>
+                          <a:spcPts val="0"/>
+                        </a:spcBef>
+                        <a:spcAft>
+                          <a:spcPts val="0"/>
+                        </a:spcAft>
+                      </a:pPr>
+                      <a:r>
+                        <a:rPr sz="1300" b="1">
+                          <a:solidFill>
+                            <a:srgbClr val="1F1F1F"/>
+                          </a:solidFill>
+                          <a:latin typeface="Calibri"/>
+                        </a:rPr>
+                        <a:t>Ofertas</a:t>
+                      </a:r>
+                    </a:p>
+                  </a:txBody>
+                  <a:tcPr marL="91440" marR="91440" marT="41148" marB="41148" anchor="ctr">
+                    <a:solidFill>
+                      <a:srgbClr val="FFFFFF"/>
+                    </a:solidFill>
+                    <a:lnL>
+                      <a:noFill/>
+                    </a:lnL>
+                    <a:lnR>
+                      <a:noFill/>
+                    </a:lnR>
+                    <a:lnT>
+                      <a:noFill/>
+                    </a:lnT>
+                    <a:lnB w="6350">
+                      <a:solidFill>
+                        <a:srgbClr val="D9DEE5"/>
+                      </a:solidFill>
+                    </a:lnB>
+                  </a:tcPr>
+                </a:tc>
+                <a:tc>
+                  <a:txBody>
+                    <a:bodyPr wrap="square">
+                      <a:noAutofit/>
+                    </a:bodyPr>
+                    <a:lstStyle/>
+                    <a:p>
+                      <a:pPr algn="ctr">
+                        <a:lnSpc>
+                          <a:spcPct val="100000"/>
+                        </a:lnSpc>
+                        <a:spcBef>
+                          <a:spcPts val="0"/>
+                        </a:spcBef>
+                        <a:spcAft>
+                          <a:spcPts val="0"/>
+                        </a:spcAft>
+                      </a:pPr>
+                      <a:r>
+                        <a:rPr sz="1300" b="0">
+                          <a:solidFill>
+                            <a:srgbClr val="1F1F1F"/>
+                          </a:solidFill>
+                          <a:latin typeface="Calibri"/>
+                        </a:rPr>
+                        <a:t>Rito, público e montante por emissão remetidos aos respectivos atos e anúncios</a:t>
+                      </a:r>
+                    </a:p>
+                  </a:txBody>
+                  <a:tcPr marL="91440" marR="91440" marT="41148" marB="41148" anchor="ctr">
+                    <a:solidFill>
+                      <a:srgbClr val="FFFFFF"/>
+                    </a:solidFill>
+                    <a:lnL>
+                      <a:noFill/>
+                    </a:lnL>
+                    <a:lnR>
+                      <a:noFill/>
+                    </a:lnR>
+                    <a:lnT>
+                      <a:noFill/>
+                    </a:lnT>
+                    <a:lnB w="6350">
+                      <a:solidFill>
+                        <a:srgbClr val="D9DEE5"/>
+                      </a:solidFill>
+                    </a:lnB>
+                  </a:tcPr>
+                </a:tc>
+              </a:tr>
+            </a:tbl>
+          </a:graphicData>
+        </a:graphic>
+      </p:graphicFrame>
+      <p:sp>
+        <p:nvSpPr>
+          <p:cNvPr id="4" name="TextBox 3"/>
+          <p:cNvSpPr txBox="1"/>
+          <p:nvPr/>
+        </p:nvSpPr>
+        <p:spPr>
+          <a:xfrm>
+            <a:off x="438912" y="6428232"/>
+            <a:ext cx="10399471" cy="164592"/>
+          </a:xfrm>
+          <a:prstGeom prst="rect">
+            <a:avLst/>
+          </a:prstGeom>
+          <a:noFill/>
+        </p:spPr>
+        <p:txBody>
+          <a:bodyPr wrap="square" lIns="0" rIns="0" tIns="0" bIns="0">
+            <a:noAutofit/>
+          </a:bodyPr>
+          <a:lstStyle/>
+          <a:p>
+            <a:pPr algn="l"/>
+            <a:r>
+              <a:rPr sz="850" b="0">
+                <a:solidFill>
+                  <a:srgbClr val="6B7280"/>
+                </a:solidFill>
+                <a:latin typeface="Calibri"/>
+              </a:rPr>
+              <a:t>Leitura documental: 07/10/2026. Fontes e referências nas notas do slide.</a:t>
+            </a:r>
+          </a:p>
+        </p:txBody>
+      </p:sp>
+      <p:sp>
+        <p:nvSpPr>
+          <p:cNvPr id="5" name="TextBox 4"/>
+          <p:cNvSpPr txBox="1"/>
+          <p:nvPr/>
+        </p:nvSpPr>
+        <p:spPr>
+          <a:xfrm>
+            <a:off x="11112703" y="6428232"/>
+            <a:ext cx="640080" cy="164592"/>
+          </a:xfrm>
+          <a:prstGeom prst="rect">
+            <a:avLst/>
+          </a:prstGeom>
+          <a:noFill/>
+        </p:spPr>
+        <p:txBody>
+          <a:bodyPr wrap="square" lIns="0" rIns="0" tIns="0" bIns="0">
+            <a:noAutofit/>
+          </a:bodyPr>
+          <a:lstStyle/>
+          <a:p>
+            <a:pPr algn="r"/>
+            <a:r>
+              <a:rPr sz="850" b="0">
+                <a:solidFill>
+                  <a:srgbClr val="6B7280"/>
+                </a:solidFill>
+                <a:latin typeface="Calibri"/>
+              </a:rPr>
+              <a:t>4/7</a:t>
+            </a:r>
+          </a:p>
+        </p:txBody>
+      </p:sp>
+    </p:spTree>
+  </p:cSld>
+  <p:clrMapOvr>
+    <a:masterClrMapping/>
+  </p:clrMapOvr>
+</p:sld>
+</file>
+
+<file path=ppt/slides/slide5.xml><?xml version="1.0" encoding="utf-8"?>
+<p:sld xmlns:a="http://schemas.openxmlformats.org/drawingml/2006/main" xmlns:p="http://schemas.openxmlformats.org/presentationml/2006/main" xmlns:r="http://schemas.openxmlformats.org/officeDocument/2006/relationships">
+  <p:cSld>
+    <p:bg>
+      <p:bgPr>
+        <a:solidFill>
+          <a:srgbClr val="FFFFFF"/>
+        </a:solidFill>
+        <a:effectLst/>
+      </p:bgPr>
+    </p:bg>
+    <p:spTree>
+      <p:nvGrpSpPr>
+        <p:cNvPr id="1" name=""/>
+        <p:cNvGrpSpPr/>
+        <p:nvPr/>
+      </p:nvGrpSpPr>
+      <p:grpSpPr/>
+      <p:sp>
+        <p:nvSpPr>
+          <p:cNvPr id="2" name="TextBox 1"/>
+          <p:cNvSpPr txBox="1"/>
+          <p:nvPr/>
+        </p:nvSpPr>
+        <p:spPr>
+          <a:xfrm>
+            <a:off x="438912" y="292608"/>
+            <a:ext cx="11313871" cy="557784"/>
+          </a:xfrm>
+          <a:prstGeom prst="rect">
+            <a:avLst/>
+          </a:prstGeom>
+          <a:noFill/>
+        </p:spPr>
+        <p:txBody>
+          <a:bodyPr wrap="square" lIns="0" rIns="0" tIns="0" bIns="0">
+            <a:noAutofit/>
+          </a:bodyPr>
+          <a:lstStyle/>
+          <a:p>
+            <a:pPr algn="l"/>
+            <a:r>
+              <a:rPr sz="2300" b="1">
+                <a:solidFill>
+                  <a:srgbClr val="EC7000"/>
+                </a:solidFill>
+                <a:latin typeface="Calibri"/>
+              </a:rPr>
+              <a:t>Curadoria FIDC Solfacil VI – Amortização e calendário de pagamentos</a:t>
+            </a:r>
+          </a:p>
+        </p:txBody>
+      </p:sp>
+      <p:graphicFrame>
+        <p:nvGraphicFramePr>
+          <p:cNvPr id="3" name="Table 2"/>
+          <p:cNvGraphicFramePr>
+            <a:graphicFrameLocks noGrp="1"/>
+          </p:cNvGraphicFramePr>
+          <p:nvPr/>
+        </p:nvGraphicFramePr>
+        <p:xfrm>
+          <a:off x="438912" y="932688"/>
+          <a:ext cx="11313871" cy="1243584"/>
+        </p:xfrm>
+        <a:graphic>
+          <a:graphicData uri="http://schemas.openxmlformats.org/drawingml/2006/table">
+            <a:tbl>
+              <a:tblPr>
+                <a:tableStyleId>{5C22544A-7EE6-4342-B048-85BDC9FD1C3A}</a:tableStyleId>
+              </a:tblPr>
+              <a:tblGrid>
+                <a:gridCol w="2331720"/>
+                <a:gridCol w="8982151"/>
+              </a:tblGrid>
+              <a:tr h="393192">
+                <a:tc>
+                  <a:txBody>
+                    <a:bodyPr wrap="square">
+                      <a:noAutofit/>
+                    </a:bodyPr>
+                    <a:lstStyle/>
+                    <a:p>
+                      <a:pPr algn="l">
+                        <a:lnSpc>
+                          <a:spcPct val="100000"/>
+                        </a:lnSpc>
+                        <a:spcBef>
+                          <a:spcPts val="0"/>
+                        </a:spcBef>
+                        <a:spcAft>
+                          <a:spcPts val="0"/>
+                        </a:spcAft>
+                      </a:pPr>
+                      <a:r>
+                        <a:rPr sz="1300" b="1">
+                          <a:solidFill>
+                            <a:srgbClr val="FFFFFF"/>
+                          </a:solidFill>
+                          <a:latin typeface="Calibri"/>
+                        </a:rPr>
+                        <a:t>Critério</a:t>
+                      </a:r>
+                    </a:p>
+                  </a:txBody>
+                  <a:tcPr marL="91440" marR="91440" marT="41148" marB="41148" anchor="ctr">
+                    <a:solidFill>
+                      <a:srgbClr val="FF6200"/>
+                    </a:solidFill>
+                    <a:lnL>
+                      <a:noFill/>
+                    </a:lnL>
+                    <a:lnR>
+                      <a:noFill/>
+                    </a:lnR>
+                    <a:lnT>
+                      <a:noFill/>
+                    </a:lnT>
+                    <a:lnB w="6350">
+                      <a:solidFill>
+                        <a:srgbClr val="D9DEE5"/>
+                      </a:solidFill>
+                    </a:lnB>
+                  </a:tcPr>
+                </a:tc>
+                <a:tc>
+                  <a:txBody>
+                    <a:bodyPr wrap="square">
+                      <a:noAutofit/>
+                    </a:bodyPr>
+                    <a:lstStyle/>
+                    <a:p>
+                      <a:pPr algn="ctr">
+                        <a:lnSpc>
+                          <a:spcPct val="100000"/>
+                        </a:lnSpc>
+                        <a:spcBef>
+                          <a:spcPts val="0"/>
+                        </a:spcBef>
+                        <a:spcAft>
+                          <a:spcPts val="0"/>
+                        </a:spcAft>
+                      </a:pPr>
+                      <a:r>
+                        <a:rPr sz="1300" b="1">
+                          <a:solidFill>
+                            <a:srgbClr val="FFFFFF"/>
+                          </a:solidFill>
+                          <a:latin typeface="Calibri"/>
+                        </a:rPr>
+                        <a:t>Solfácil VI</a:t>
+                      </a:r>
+                    </a:p>
+                  </a:txBody>
+                  <a:tcPr marL="91440" marR="91440" marT="41148" marB="41148" anchor="ctr">
+                    <a:solidFill>
+                      <a:srgbClr val="FF6200"/>
+                    </a:solidFill>
+                    <a:lnL>
+                      <a:noFill/>
+                    </a:lnL>
+                    <a:lnR>
+                      <a:noFill/>
+                    </a:lnR>
+                    <a:lnT>
+                      <a:noFill/>
+                    </a:lnT>
+                    <a:lnB w="6350">
+                      <a:solidFill>
+                        <a:srgbClr val="D9DEE5"/>
+                      </a:solidFill>
+                    </a:lnB>
+                  </a:tcPr>
+                </a:tc>
+              </a:tr>
+              <a:tr h="283464">
+                <a:tc>
+                  <a:txBody>
+                    <a:bodyPr wrap="square">
+                      <a:noAutofit/>
+                    </a:bodyPr>
+                    <a:lstStyle/>
+                    <a:p>
+                      <a:pPr algn="l">
+                        <a:lnSpc>
+                          <a:spcPct val="100000"/>
+                        </a:lnSpc>
+                        <a:spcBef>
+                          <a:spcPts val="0"/>
+                        </a:spcBef>
+                        <a:spcAft>
+                          <a:spcPts val="0"/>
+                        </a:spcAft>
+                      </a:pPr>
+                      <a:r>
+                        <a:rPr sz="1300" b="1">
+                          <a:solidFill>
+                            <a:srgbClr val="1F1F1F"/>
+                          </a:solidFill>
+                          <a:latin typeface="Calibri"/>
+                        </a:rPr>
+                        <a:t>Carência</a:t>
+                      </a:r>
+                    </a:p>
+                  </a:txBody>
+                  <a:tcPr marL="91440" marR="91440" marT="41148" marB="41148" anchor="ctr">
+                    <a:solidFill>
+                      <a:srgbClr val="FFFFFF"/>
+                    </a:solidFill>
+                    <a:lnL>
+                      <a:noFill/>
+                    </a:lnL>
+                    <a:lnR>
+                      <a:noFill/>
+                    </a:lnR>
+                    <a:lnT>
+                      <a:noFill/>
+                    </a:lnT>
+                    <a:lnB>
+                      <a:noFill/>
+                    </a:lnB>
+                  </a:tcPr>
+                </a:tc>
+                <a:tc>
+                  <a:txBody>
+                    <a:bodyPr wrap="square">
+                      <a:noAutofit/>
+                    </a:bodyPr>
+                    <a:lstStyle/>
+                    <a:p>
+                      <a:pPr algn="ctr">
+                        <a:lnSpc>
+                          <a:spcPct val="100000"/>
+                        </a:lnSpc>
+                        <a:spcBef>
+                          <a:spcPts val="0"/>
+                        </a:spcBef>
+                        <a:spcAft>
+                          <a:spcPts val="0"/>
+                        </a:spcAft>
+                      </a:pPr>
+                      <a:r>
+                        <a:rPr sz="1300" b="0">
+                          <a:solidFill>
+                            <a:srgbClr val="1F1F1F"/>
+                          </a:solidFill>
+                          <a:latin typeface="Calibri"/>
+                        </a:rPr>
+                        <a:t>-</a:t>
+                      </a:r>
+                    </a:p>
+                  </a:txBody>
+                  <a:tcPr marL="91440" marR="91440" marT="41148" marB="41148" anchor="ctr">
+                    <a:solidFill>
+                      <a:srgbClr val="FFFFFF"/>
+                    </a:solidFill>
+                    <a:lnL>
+                      <a:noFill/>
+                    </a:lnL>
+                    <a:lnR>
+                      <a:noFill/>
+                    </a:lnR>
+                    <a:lnT>
+                      <a:noFill/>
+                    </a:lnT>
+                    <a:lnB>
+                      <a:noFill/>
+                    </a:lnB>
+                  </a:tcPr>
+                </a:tc>
+              </a:tr>
+              <a:tr h="283464">
+                <a:tc>
+                  <a:txBody>
+                    <a:bodyPr wrap="square">
+                      <a:noAutofit/>
+                    </a:bodyPr>
+                    <a:lstStyle/>
+                    <a:p>
+                      <a:pPr algn="l">
+                        <a:lnSpc>
+                          <a:spcPct val="100000"/>
+                        </a:lnSpc>
+                        <a:spcBef>
+                          <a:spcPts val="0"/>
+                        </a:spcBef>
+                        <a:spcAft>
+                          <a:spcPts val="0"/>
+                        </a:spcAft>
+                      </a:pPr>
+                      <a:r>
+                        <a:rPr sz="1300" b="1">
+                          <a:solidFill>
+                            <a:srgbClr val="1F1F1F"/>
+                          </a:solidFill>
+                          <a:latin typeface="Calibri"/>
+                        </a:rPr>
+                        <a:t>Juros/amortização</a:t>
+                      </a:r>
+                    </a:p>
+                  </a:txBody>
+                  <a:tcPr marL="91440" marR="91440" marT="41148" marB="41148" anchor="ctr">
+                    <a:solidFill>
+                      <a:srgbClr val="FFFFFF"/>
+                    </a:solidFill>
+                    <a:lnL>
+                      <a:noFill/>
+                    </a:lnL>
+                    <a:lnR>
+                      <a:noFill/>
+                    </a:lnR>
+                    <a:lnT>
+                      <a:noFill/>
+                    </a:lnT>
+                    <a:lnB>
+                      <a:noFill/>
+                    </a:lnB>
+                  </a:tcPr>
+                </a:tc>
+                <a:tc>
+                  <a:txBody>
+                    <a:bodyPr wrap="square">
+                      <a:noAutofit/>
+                    </a:bodyPr>
+                    <a:lstStyle/>
+                    <a:p>
+                      <a:pPr algn="ctr">
+                        <a:lnSpc>
+                          <a:spcPct val="100000"/>
+                        </a:lnSpc>
+                        <a:spcBef>
+                          <a:spcPts val="0"/>
+                        </a:spcBef>
+                        <a:spcAft>
+                          <a:spcPts val="0"/>
+                        </a:spcAft>
+                      </a:pPr>
+                      <a:r>
+                        <a:rPr sz="1300" b="0">
+                          <a:solidFill>
+                            <a:srgbClr val="1F1F1F"/>
+                          </a:solidFill>
+                          <a:latin typeface="Calibri"/>
+                        </a:rPr>
+                        <a:t>Pagamentos sujeitos à disponibilidade de caixa e waterfall</a:t>
+                      </a:r>
+                    </a:p>
+                  </a:txBody>
+                  <a:tcPr marL="91440" marR="91440" marT="41148" marB="41148" anchor="ctr">
+                    <a:solidFill>
+                      <a:srgbClr val="FFFFFF"/>
+                    </a:solidFill>
+                    <a:lnL>
+                      <a:noFill/>
+                    </a:lnL>
+                    <a:lnR>
+                      <a:noFill/>
+                    </a:lnR>
+                    <a:lnT>
+                      <a:noFill/>
+                    </a:lnT>
+                    <a:lnB>
+                      <a:noFill/>
+                    </a:lnB>
+                  </a:tcPr>
+                </a:tc>
+              </a:tr>
+              <a:tr h="283464">
+                <a:tc>
+                  <a:txBody>
+                    <a:bodyPr wrap="square">
+                      <a:noAutofit/>
+                    </a:bodyPr>
+                    <a:lstStyle/>
+                    <a:p>
+                      <a:pPr algn="l">
+                        <a:lnSpc>
+                          <a:spcPct val="100000"/>
+                        </a:lnSpc>
+                        <a:spcBef>
+                          <a:spcPts val="0"/>
+                        </a:spcBef>
+                        <a:spcAft>
+                          <a:spcPts val="0"/>
+                        </a:spcAft>
+                      </a:pPr>
+                      <a:r>
+                        <a:rPr sz="1300" b="1">
+                          <a:solidFill>
+                            <a:srgbClr val="1F1F1F"/>
+                          </a:solidFill>
+                          <a:latin typeface="Calibri"/>
+                        </a:rPr>
+                        <a:t>Vencimento</a:t>
+                      </a:r>
+                    </a:p>
+                  </a:txBody>
+                  <a:tcPr marL="91440" marR="91440" marT="41148" marB="41148" anchor="ctr">
+                    <a:solidFill>
+                      <a:srgbClr val="FFFFFF"/>
+                    </a:solidFill>
+                    <a:lnL>
+                      <a:noFill/>
+                    </a:lnL>
+                    <a:lnR>
+                      <a:noFill/>
+                    </a:lnR>
+                    <a:lnT>
+                      <a:noFill/>
+                    </a:lnT>
+                    <a:lnB w="6350">
+                      <a:solidFill>
+                        <a:srgbClr val="D9DEE5"/>
+                      </a:solidFill>
+                    </a:lnB>
+                  </a:tcPr>
+                </a:tc>
+                <a:tc>
+                  <a:txBody>
+                    <a:bodyPr wrap="square">
+                      <a:noAutofit/>
+                    </a:bodyPr>
+                    <a:lstStyle/>
+                    <a:p>
+                      <a:pPr algn="ctr">
+                        <a:lnSpc>
+                          <a:spcPct val="100000"/>
+                        </a:lnSpc>
+                        <a:spcBef>
+                          <a:spcPts val="0"/>
+                        </a:spcBef>
+                        <a:spcAft>
+                          <a:spcPts val="0"/>
+                        </a:spcAft>
+                      </a:pPr>
+                      <a:r>
+                        <a:rPr sz="1300" b="0">
+                          <a:solidFill>
+                            <a:srgbClr val="1F1F1F"/>
+                          </a:solidFill>
+                          <a:latin typeface="Calibri"/>
+                        </a:rPr>
+                        <a:t>-</a:t>
+                      </a:r>
+                    </a:p>
+                  </a:txBody>
+                  <a:tcPr marL="91440" marR="91440" marT="41148" marB="41148" anchor="ctr">
+                    <a:solidFill>
+                      <a:srgbClr val="FFFFFF"/>
+                    </a:solidFill>
+                    <a:lnL>
+                      <a:noFill/>
+                    </a:lnL>
+                    <a:lnR>
+                      <a:noFill/>
+                    </a:lnR>
+                    <a:lnT>
+                      <a:noFill/>
+                    </a:lnT>
+                    <a:lnB w="6350">
+                      <a:solidFill>
+                        <a:srgbClr val="D9DEE5"/>
+                      </a:solidFill>
+                    </a:lnB>
+                  </a:tcPr>
+                </a:tc>
+              </a:tr>
+            </a:tbl>
+          </a:graphicData>
+        </a:graphic>
+      </p:graphicFrame>
+      <p:sp>
+        <p:nvSpPr>
+          <p:cNvPr id="4" name="TextBox 3"/>
+          <p:cNvSpPr txBox="1"/>
+          <p:nvPr/>
+        </p:nvSpPr>
+        <p:spPr>
+          <a:xfrm>
+            <a:off x="438912" y="6428232"/>
+            <a:ext cx="10399471" cy="164592"/>
+          </a:xfrm>
+          <a:prstGeom prst="rect">
+            <a:avLst/>
+          </a:prstGeom>
+          <a:noFill/>
+        </p:spPr>
+        <p:txBody>
+          <a:bodyPr wrap="square" lIns="0" rIns="0" tIns="0" bIns="0">
+            <a:noAutofit/>
+          </a:bodyPr>
+          <a:lstStyle/>
+          <a:p>
+            <a:pPr algn="l"/>
+            <a:r>
+              <a:rPr sz="850" b="0">
+                <a:solidFill>
+                  <a:srgbClr val="6B7280"/>
+                </a:solidFill>
+                <a:latin typeface="Calibri"/>
+              </a:rPr>
+              <a:t>Leitura documental: 07/10/2026. Fontes e referências nas notas do slide.</a:t>
+            </a:r>
+          </a:p>
+        </p:txBody>
+      </p:sp>
+      <p:sp>
+        <p:nvSpPr>
+          <p:cNvPr id="5" name="TextBox 4"/>
+          <p:cNvSpPr txBox="1"/>
+          <p:nvPr/>
+        </p:nvSpPr>
+        <p:spPr>
+          <a:xfrm>
+            <a:off x="11112703" y="6428232"/>
+            <a:ext cx="640080" cy="164592"/>
+          </a:xfrm>
+          <a:prstGeom prst="rect">
+            <a:avLst/>
+          </a:prstGeom>
+          <a:noFill/>
+        </p:spPr>
+        <p:txBody>
+          <a:bodyPr wrap="square" lIns="0" rIns="0" tIns="0" bIns="0">
+            <a:noAutofit/>
+          </a:bodyPr>
+          <a:lstStyle/>
+          <a:p>
+            <a:pPr algn="r"/>
+            <a:r>
+              <a:rPr sz="850" b="0">
+                <a:solidFill>
+                  <a:srgbClr val="6B7280"/>
+                </a:solidFill>
+                <a:latin typeface="Calibri"/>
+              </a:rPr>
+              <a:t>5/7</a:t>
+            </a:r>
+          </a:p>
+        </p:txBody>
+      </p:sp>
+    </p:spTree>
+  </p:cSld>
+  <p:clrMapOvr>
+    <a:masterClrMapping/>
+  </p:clrMapOvr>
+</p:sld>
+</file>
+
+<file path=ppt/slides/slide6.xml><?xml version="1.0" encoding="utf-8"?>
+<p:sld xmlns:a="http://schemas.openxmlformats.org/drawingml/2006/main" xmlns:p="http://schemas.openxmlformats.org/presentationml/2006/main" xmlns:r="http://schemas.openxmlformats.org/officeDocument/2006/relationships">
+  <p:cSld>
+    <p:bg>
+      <p:bgPr>
+        <a:solidFill>
+          <a:srgbClr val="FFFFFF"/>
+        </a:solidFill>
+        <a:effectLst/>
+      </p:bgPr>
+    </p:bg>
+    <p:spTree>
+      <p:nvGrpSpPr>
+        <p:cNvPr id="1" name=""/>
+        <p:cNvGrpSpPr/>
+        <p:nvPr/>
+      </p:nvGrpSpPr>
+      <p:grpSpPr/>
+      <p:sp>
+        <p:nvSpPr>
+          <p:cNvPr id="2" name="TextBox 1"/>
+          <p:cNvSpPr txBox="1"/>
+          <p:nvPr/>
+        </p:nvSpPr>
+        <p:spPr>
+          <a:xfrm>
+            <a:off x="438912" y="292608"/>
+            <a:ext cx="11313871" cy="557784"/>
+          </a:xfrm>
+          <a:prstGeom prst="rect">
+            <a:avLst/>
+          </a:prstGeom>
+          <a:noFill/>
+        </p:spPr>
+        <p:txBody>
+          <a:bodyPr wrap="square" lIns="0" rIns="0" tIns="0" bIns="0">
+            <a:noAutofit/>
+          </a:bodyPr>
+          <a:lstStyle/>
+          <a:p>
+            <a:pPr algn="l"/>
+            <a:r>
+              <a:rPr sz="2300" b="1">
+                <a:solidFill>
+                  <a:srgbClr val="EC7000"/>
+                </a:solidFill>
+                <a:latin typeface="Calibri"/>
+              </a:rPr>
+              <a:t>Curadoria FIDC Solfacil VI – Custos estruturais</a:t>
+            </a:r>
+          </a:p>
+        </p:txBody>
+      </p:sp>
+      <p:graphicFrame>
+        <p:nvGraphicFramePr>
+          <p:cNvPr id="3" name="Table 2"/>
+          <p:cNvGraphicFramePr>
+            <a:graphicFrameLocks noGrp="1"/>
+          </p:cNvGraphicFramePr>
+          <p:nvPr/>
+        </p:nvGraphicFramePr>
+        <p:xfrm>
+          <a:off x="438912" y="932688"/>
+          <a:ext cx="11313871" cy="1243584"/>
+        </p:xfrm>
+        <a:graphic>
+          <a:graphicData uri="http://schemas.openxmlformats.org/drawingml/2006/table">
+            <a:tbl>
+              <a:tblPr>
+                <a:tableStyleId>{5C22544A-7EE6-4342-B048-85BDC9FD1C3A}</a:tableStyleId>
+              </a:tblPr>
+              <a:tblGrid>
+                <a:gridCol w="2331720"/>
+                <a:gridCol w="8982151"/>
+              </a:tblGrid>
+              <a:tr h="393192">
+                <a:tc>
+                  <a:txBody>
+                    <a:bodyPr wrap="square">
+                      <a:noAutofit/>
+                    </a:bodyPr>
+                    <a:lstStyle/>
+                    <a:p>
+                      <a:pPr algn="l">
+                        <a:lnSpc>
+                          <a:spcPct val="100000"/>
+                        </a:lnSpc>
+                        <a:spcBef>
+                          <a:spcPts val="0"/>
+                        </a:spcBef>
+                        <a:spcAft>
+                          <a:spcPts val="0"/>
+                        </a:spcAft>
+                      </a:pPr>
+                      <a:r>
+                        <a:rPr sz="1300" b="1">
+                          <a:solidFill>
+                            <a:srgbClr val="FFFFFF"/>
+                          </a:solidFill>
+                          <a:latin typeface="Calibri"/>
+                        </a:rPr>
+                        <a:t>Critério</a:t>
+                      </a:r>
+                    </a:p>
+                  </a:txBody>
+                  <a:tcPr marL="91440" marR="91440" marT="41148" marB="41148" anchor="ctr">
+                    <a:solidFill>
+                      <a:srgbClr val="FF6200"/>
+                    </a:solidFill>
+                    <a:lnL>
+                      <a:noFill/>
+                    </a:lnL>
+                    <a:lnR>
+                      <a:noFill/>
+                    </a:lnR>
+                    <a:lnT>
+                      <a:noFill/>
+                    </a:lnT>
+                    <a:lnB w="6350">
+                      <a:solidFill>
+                        <a:srgbClr val="D9DEE5"/>
+                      </a:solidFill>
+                    </a:lnB>
+                  </a:tcPr>
+                </a:tc>
+                <a:tc>
+                  <a:txBody>
+                    <a:bodyPr wrap="square">
+                      <a:noAutofit/>
+                    </a:bodyPr>
+                    <a:lstStyle/>
+                    <a:p>
+                      <a:pPr algn="ctr">
+                        <a:lnSpc>
+                          <a:spcPct val="100000"/>
+                        </a:lnSpc>
+                        <a:spcBef>
+                          <a:spcPts val="0"/>
+                        </a:spcBef>
+                        <a:spcAft>
+                          <a:spcPts val="0"/>
+                        </a:spcAft>
+                      </a:pPr>
+                      <a:r>
+                        <a:rPr sz="1300" b="1">
+                          <a:solidFill>
+                            <a:srgbClr val="FFFFFF"/>
+                          </a:solidFill>
+                          <a:latin typeface="Calibri"/>
+                        </a:rPr>
+                        <a:t>Solfácil VI</a:t>
+                      </a:r>
+                    </a:p>
+                  </a:txBody>
+                  <a:tcPr marL="91440" marR="91440" marT="41148" marB="41148" anchor="ctr">
+                    <a:solidFill>
+                      <a:srgbClr val="FF6200"/>
+                    </a:solidFill>
+                    <a:lnL>
+                      <a:noFill/>
+                    </a:lnL>
+                    <a:lnR>
+                      <a:noFill/>
+                    </a:lnR>
+                    <a:lnT>
+                      <a:noFill/>
+                    </a:lnT>
+                    <a:lnB w="6350">
+                      <a:solidFill>
+                        <a:srgbClr val="D9DEE5"/>
+                      </a:solidFill>
+                    </a:lnB>
+                  </a:tcPr>
+                </a:tc>
+              </a:tr>
+              <a:tr h="283464">
+                <a:tc>
+                  <a:txBody>
+                    <a:bodyPr wrap="square">
+                      <a:noAutofit/>
+                    </a:bodyPr>
+                    <a:lstStyle/>
+                    <a:p>
+                      <a:pPr algn="l">
+                        <a:lnSpc>
+                          <a:spcPct val="100000"/>
+                        </a:lnSpc>
+                        <a:spcBef>
+                          <a:spcPts val="0"/>
+                        </a:spcBef>
+                        <a:spcAft>
+                          <a:spcPts val="0"/>
+                        </a:spcAft>
+                      </a:pPr>
+                      <a:r>
+                        <a:rPr sz="1300" b="1">
+                          <a:solidFill>
+                            <a:srgbClr val="1F1F1F"/>
+                          </a:solidFill>
+                          <a:latin typeface="Calibri"/>
+                        </a:rPr>
+                        <a:t>Administração</a:t>
+                      </a:r>
+                    </a:p>
+                  </a:txBody>
+                  <a:tcPr marL="91440" marR="91440" marT="41148" marB="41148" anchor="ctr">
+                    <a:solidFill>
+                      <a:srgbClr val="FFFFFF"/>
+                    </a:solidFill>
+                    <a:lnL>
+                      <a:noFill/>
+                    </a:lnL>
+                    <a:lnR>
+                      <a:noFill/>
+                    </a:lnR>
+                    <a:lnT>
+                      <a:noFill/>
+                    </a:lnT>
+                    <a:lnB>
+                      <a:noFill/>
+                    </a:lnB>
+                  </a:tcPr>
+                </a:tc>
+                <a:tc>
+                  <a:txBody>
+                    <a:bodyPr wrap="square">
+                      <a:noAutofit/>
+                    </a:bodyPr>
+                    <a:lstStyle/>
+                    <a:p>
+                      <a:pPr algn="ctr">
+                        <a:lnSpc>
+                          <a:spcPct val="100000"/>
+                        </a:lnSpc>
+                        <a:spcBef>
+                          <a:spcPts val="0"/>
+                        </a:spcBef>
+                        <a:spcAft>
+                          <a:spcPts val="0"/>
+                        </a:spcAft>
+                      </a:pPr>
+                      <a:r>
+                        <a:rPr sz="1300" b="0">
+                          <a:solidFill>
+                            <a:srgbClr val="1F1F1F"/>
+                          </a:solidFill>
+                          <a:latin typeface="Calibri"/>
+                        </a:rPr>
+                        <a:t>0,10% a.a./PL; mínimo R$ 10.833,33/mês; IPCA positivo anual.</a:t>
+                      </a:r>
+                    </a:p>
+                  </a:txBody>
+                  <a:tcPr marL="91440" marR="91440" marT="41148" marB="41148" anchor="ctr">
+                    <a:solidFill>
+                      <a:srgbClr val="FFFFFF"/>
+                    </a:solidFill>
+                    <a:lnL>
+                      <a:noFill/>
+                    </a:lnL>
+                    <a:lnR>
+                      <a:noFill/>
+                    </a:lnR>
+                    <a:lnT>
+                      <a:noFill/>
+                    </a:lnT>
+                    <a:lnB>
+                      <a:noFill/>
+                    </a:lnB>
+                  </a:tcPr>
+                </a:tc>
+              </a:tr>
+              <a:tr h="283464">
+                <a:tc>
+                  <a:txBody>
+                    <a:bodyPr wrap="square">
+                      <a:noAutofit/>
+                    </a:bodyPr>
+                    <a:lstStyle/>
+                    <a:p>
+                      <a:pPr algn="l">
+                        <a:lnSpc>
+                          <a:spcPct val="100000"/>
+                        </a:lnSpc>
+                        <a:spcBef>
+                          <a:spcPts val="0"/>
+                        </a:spcBef>
+                        <a:spcAft>
+                          <a:spcPts val="0"/>
+                        </a:spcAft>
+                      </a:pPr>
+                      <a:r>
+                        <a:rPr sz="1300" b="1">
+                          <a:solidFill>
+                            <a:srgbClr val="1F1F1F"/>
+                          </a:solidFill>
+                          <a:latin typeface="Calibri"/>
+                        </a:rPr>
+                        <a:t>Gestão</a:t>
+                      </a:r>
+                    </a:p>
+                  </a:txBody>
+                  <a:tcPr marL="91440" marR="91440" marT="41148" marB="41148" anchor="ctr">
+                    <a:solidFill>
+                      <a:srgbClr val="FFFFFF"/>
+                    </a:solidFill>
+                    <a:lnL>
+                      <a:noFill/>
+                    </a:lnL>
+                    <a:lnR>
+                      <a:noFill/>
+                    </a:lnR>
+                    <a:lnT>
+                      <a:noFill/>
+                    </a:lnT>
+                    <a:lnB>
+                      <a:noFill/>
+                    </a:lnB>
+                  </a:tcPr>
+                </a:tc>
+                <a:tc>
+                  <a:txBody>
+                    <a:bodyPr wrap="square">
+                      <a:noAutofit/>
+                    </a:bodyPr>
+                    <a:lstStyle/>
+                    <a:p>
+                      <a:pPr algn="ctr">
+                        <a:lnSpc>
+                          <a:spcPct val="100000"/>
+                        </a:lnSpc>
+                        <a:spcBef>
+                          <a:spcPts val="0"/>
+                        </a:spcBef>
+                        <a:spcAft>
+                          <a:spcPts val="0"/>
+                        </a:spcAft>
+                      </a:pPr>
+                      <a:r>
+                        <a:rPr sz="1300" b="0">
+                          <a:solidFill>
+                            <a:srgbClr val="1F1F1F"/>
+                          </a:solidFill>
+                          <a:latin typeface="Calibri"/>
+                        </a:rPr>
+                        <a:t>0,20% a.a./PL; mínimo R$ 18,5 mil/mês; IPCA positivo anual.</a:t>
+                      </a:r>
+                    </a:p>
+                  </a:txBody>
+                  <a:tcPr marL="91440" marR="91440" marT="41148" marB="41148" anchor="ctr">
+                    <a:solidFill>
+                      <a:srgbClr val="FFFFFF"/>
+                    </a:solidFill>
+                    <a:lnL>
+                      <a:noFill/>
+                    </a:lnL>
+                    <a:lnR>
+                      <a:noFill/>
+                    </a:lnR>
+                    <a:lnT>
+                      <a:noFill/>
+                    </a:lnT>
+                    <a:lnB>
+                      <a:noFill/>
+                    </a:lnB>
+                  </a:tcPr>
+                </a:tc>
+              </a:tr>
+              <a:tr h="283464">
+                <a:tc>
+                  <a:txBody>
+                    <a:bodyPr wrap="square">
+                      <a:noAutofit/>
+                    </a:bodyPr>
+                    <a:lstStyle/>
+                    <a:p>
+                      <a:pPr algn="l">
+                        <a:lnSpc>
+                          <a:spcPct val="100000"/>
+                        </a:lnSpc>
+                        <a:spcBef>
+                          <a:spcPts val="0"/>
+                        </a:spcBef>
+                        <a:spcAft>
+                          <a:spcPts val="0"/>
+                        </a:spcAft>
+                      </a:pPr>
+                      <a:r>
+                        <a:rPr sz="1300" b="1">
+                          <a:solidFill>
+                            <a:srgbClr val="1F1F1F"/>
+                          </a:solidFill>
+                          <a:latin typeface="Calibri"/>
+                        </a:rPr>
+                        <a:t>Custódia</a:t>
+                      </a:r>
+                    </a:p>
+                  </a:txBody>
+                  <a:tcPr marL="91440" marR="91440" marT="41148" marB="41148" anchor="ctr">
+                    <a:solidFill>
+                      <a:srgbClr val="FFFFFF"/>
+                    </a:solidFill>
+                    <a:lnL>
+                      <a:noFill/>
+                    </a:lnL>
+                    <a:lnR>
+                      <a:noFill/>
+                    </a:lnR>
+                    <a:lnT>
+                      <a:noFill/>
+                    </a:lnT>
+                    <a:lnB w="6350">
+                      <a:solidFill>
+                        <a:srgbClr val="D9DEE5"/>
+                      </a:solidFill>
+                    </a:lnB>
+                  </a:tcPr>
+                </a:tc>
+                <a:tc>
+                  <a:txBody>
+                    <a:bodyPr wrap="square">
+                      <a:noAutofit/>
+                    </a:bodyPr>
+                    <a:lstStyle/>
+                    <a:p>
+                      <a:pPr algn="ctr">
+                        <a:lnSpc>
+                          <a:spcPct val="100000"/>
+                        </a:lnSpc>
+                        <a:spcBef>
+                          <a:spcPts val="0"/>
+                        </a:spcBef>
+                        <a:spcAft>
+                          <a:spcPts val="0"/>
+                        </a:spcAft>
+                      </a:pPr>
+                      <a:r>
+                        <a:rPr sz="1300" b="0">
+                          <a:solidFill>
+                            <a:srgbClr val="1F1F1F"/>
+                          </a:solidFill>
+                          <a:latin typeface="Calibri"/>
+                        </a:rPr>
+                        <a:t>0,02% a.a./PL; mínimo R$ 2.166,67/mês; IPCA positivo anual.</a:t>
+                      </a:r>
+                    </a:p>
+                  </a:txBody>
+                  <a:tcPr marL="91440" marR="91440" marT="41148" marB="41148" anchor="ctr">
+                    <a:solidFill>
+                      <a:srgbClr val="FFFFFF"/>
+                    </a:solidFill>
+                    <a:lnL>
+                      <a:noFill/>
+                    </a:lnL>
+                    <a:lnR>
+                      <a:noFill/>
+                    </a:lnR>
+                    <a:lnT>
+                      <a:noFill/>
+                    </a:lnT>
+                    <a:lnB w="6350">
+                      <a:solidFill>
+                        <a:srgbClr val="D9DEE5"/>
+                      </a:solidFill>
+                    </a:lnB>
+                  </a:tcPr>
+                </a:tc>
+              </a:tr>
+            </a:tbl>
+          </a:graphicData>
+        </a:graphic>
+      </p:graphicFrame>
+      <p:sp>
+        <p:nvSpPr>
+          <p:cNvPr id="4" name="TextBox 3"/>
+          <p:cNvSpPr txBox="1"/>
+          <p:nvPr/>
+        </p:nvSpPr>
+        <p:spPr>
+          <a:xfrm>
+            <a:off x="438912" y="6428232"/>
+            <a:ext cx="10399471" cy="164592"/>
+          </a:xfrm>
+          <a:prstGeom prst="rect">
+            <a:avLst/>
+          </a:prstGeom>
+          <a:noFill/>
+        </p:spPr>
+        <p:txBody>
+          <a:bodyPr wrap="square" lIns="0" rIns="0" tIns="0" bIns="0">
+            <a:noAutofit/>
+          </a:bodyPr>
+          <a:lstStyle/>
+          <a:p>
+            <a:pPr algn="l"/>
+            <a:r>
+              <a:rPr sz="850" b="0">
+                <a:solidFill>
+                  <a:srgbClr val="6B7280"/>
+                </a:solidFill>
+                <a:latin typeface="Calibri"/>
+              </a:rPr>
+              <a:t>Leitura documental: 07/10/2026. Fontes e referências nas notas do slide.</a:t>
+            </a:r>
+          </a:p>
+        </p:txBody>
+      </p:sp>
+      <p:sp>
+        <p:nvSpPr>
+          <p:cNvPr id="5" name="TextBox 4"/>
+          <p:cNvSpPr txBox="1"/>
+          <p:nvPr/>
+        </p:nvSpPr>
+        <p:spPr>
+          <a:xfrm>
+            <a:off x="11112703" y="6428232"/>
+            <a:ext cx="640080" cy="164592"/>
+          </a:xfrm>
+          <a:prstGeom prst="rect">
+            <a:avLst/>
+          </a:prstGeom>
+          <a:noFill/>
+        </p:spPr>
+        <p:txBody>
+          <a:bodyPr wrap="square" lIns="0" rIns="0" tIns="0" bIns="0">
+            <a:noAutofit/>
+          </a:bodyPr>
+          <a:lstStyle/>
+          <a:p>
+            <a:pPr algn="r"/>
+            <a:r>
+              <a:rPr sz="850" b="0">
+                <a:solidFill>
+                  <a:srgbClr val="6B7280"/>
+                </a:solidFill>
+                <a:latin typeface="Calibri"/>
+              </a:rPr>
+              <a:t>6/7</a:t>
+            </a:r>
+          </a:p>
+        </p:txBody>
+      </p:sp>
+    </p:spTree>
+  </p:cSld>
+  <p:clrMapOvr>
+    <a:masterClrMapping/>
+  </p:clrMapOvr>
+</p:sld>
+</file>
+
+<file path=ppt/slides/slide7.xml><?xml version="1.0" encoding="utf-8"?>
+<p:sld xmlns:a="http://schemas.openxmlformats.org/drawingml/2006/main" xmlns:p="http://schemas.openxmlformats.org/presentationml/2006/main" xmlns:r="http://schemas.openxmlformats.org/officeDocument/2006/relationships">
+  <p:cSld>
+    <p:bg>
+      <p:bgPr>
+        <a:solidFill>
+          <a:srgbClr val="FFFFFF"/>
+        </a:solidFill>
+        <a:effectLst/>
+      </p:bgPr>
+    </p:bg>
+    <p:spTree>
+      <p:nvGrpSpPr>
+        <p:cNvPr id="1" name=""/>
+        <p:cNvGrpSpPr/>
+        <p:nvPr/>
+      </p:nvGrpSpPr>
+      <p:grpSpPr/>
+      <p:sp>
+        <p:nvSpPr>
+          <p:cNvPr id="2" name="TextBox 1"/>
+          <p:cNvSpPr txBox="1"/>
+          <p:nvPr/>
+        </p:nvSpPr>
+        <p:spPr>
+          <a:xfrm>
+            <a:off x="438912" y="292608"/>
+            <a:ext cx="11313871" cy="557784"/>
+          </a:xfrm>
+          <a:prstGeom prst="rect">
+            <a:avLst/>
+          </a:prstGeom>
+          <a:noFill/>
+        </p:spPr>
+        <p:txBody>
+          <a:bodyPr wrap="square" lIns="0" rIns="0" tIns="0" bIns="0">
+            <a:noAutofit/>
+          </a:bodyPr>
+          <a:lstStyle/>
+          <a:p>
+            <a:pPr algn="l"/>
+            <a:r>
+              <a:rPr sz="2300" b="1">
+                <a:solidFill>
+                  <a:srgbClr val="EC7000"/>
+                </a:solidFill>
+                <a:latin typeface="Calibri"/>
+              </a:rPr>
+              <a:t>Curadoria FIDC Solfacil VI – Monitoramento IME e controles documentais</a:t>
             </a:r>
           </a:p>
         </p:txBody>
@@ -6916,7 +8681,7 @@
                       <a:r>
                         <a:rPr sz="1300" b="1">
                           <a:solidFill>
-                            <a:srgbClr val="1F1F1F"/>
+                            <a:srgbClr val="FFFFFF"/>
                           </a:solidFill>
                           <a:latin typeface="Calibri"/>
                         </a:rPr>
@@ -6926,7 +8691,7 @@
                   </a:txBody>
                   <a:tcPr marL="91440" marR="91440" marT="41148" marB="41148" anchor="ctr">
                     <a:solidFill>
-                      <a:srgbClr val="EC7000"/>
+                      <a:srgbClr val="FF6200"/>
                     </a:solidFill>
                     <a:lnL>
                       <a:noFill/>
@@ -6965,7 +8730,7 @@
                       <a:r>
                         <a:rPr sz="1300" b="1">
                           <a:solidFill>
-                            <a:srgbClr val="1F1F1F"/>
+                            <a:srgbClr val="FFFFFF"/>
                           </a:solidFill>
                           <a:latin typeface="Calibri"/>
                         </a:rPr>
@@ -6975,7 +8740,7 @@
                   </a:txBody>
                   <a:tcPr marL="91440" marR="91440" marT="41148" marB="41148" anchor="ctr">
                     <a:solidFill>
-                      <a:srgbClr val="EC7000"/>
+                      <a:srgbClr val="FF6200"/>
                     </a:solidFill>
                     <a:lnL>
                       <a:noFill/>
@@ -7020,7 +8785,29 @@
                           </a:solidFill>
                           <a:latin typeface="Calibri"/>
                         </a:rPr>
-                        <a:t>Classes/séries</a:t>
+                        <a:t>Alocação/subordinação</a:t>
+                      </a:r>
+                    </a:p>
+                    <a:p>
+                      <a:pPr algn="l">
+                        <a:lnSpc>
+                          <a:spcPct val="100000"/>
+                        </a:lnSpc>
+                        <a:spcBef>
+                          <a:spcPts val="0"/>
+                        </a:spcBef>
+                        <a:spcAft>
+                          <a:spcPts val="0"/>
+                        </a:spcAft>
+                      </a:pPr>
+                      <a:r>
+                        <a:rPr sz="1300" b="1">
+                          <a:solidFill>
+                            <a:srgbClr val="1F1F1F"/>
+                          </a:solidFill>
+                          <a:latin typeface="Calibri"/>
+                        </a:rPr>
+                        <a:t>IME</a:t>
                       </a:r>
                     </a:p>
                   </a:txBody>
@@ -7067,9 +8854,83 @@
                           </a:solidFill>
                           <a:latin typeface="Calibri"/>
                         </a:rPr>
-                        <a:t>Sênior, subordinadas mezanino e júnior; modelos de emissão não comprovam todas as séries em</a:t>
+                        <a:t>DC/PL e cotas subordinadas/PL: cálculo agregado com validação de classes e do denominador.</a:t>
                       </a:r>
                     </a:p>
+                  </a:txBody>
+                  <a:tcPr marL="91440" marR="91440" marT="41148" marB="41148" anchor="ctr">
+                    <a:solidFill>
+                      <a:srgbClr val="FFFFFF"/>
+                    </a:solidFill>
+                    <a:lnL>
+                      <a:noFill/>
+                    </a:lnL>
+                    <a:lnR>
+                      <a:noFill/>
+                    </a:lnR>
+                    <a:lnT>
+                      <a:noFill/>
+                    </a:lnT>
+                    <a:lnB>
+                      <a:noFill/>
+                    </a:lnB>
+                  </a:tcPr>
+                </a:tc>
+              </a:tr>
+              <a:tr h="470916">
+                <a:tc>
+                  <a:txBody>
+                    <a:bodyPr wrap="square">
+                      <a:noAutofit/>
+                    </a:bodyPr>
+                    <a:lstStyle/>
+                    <a:p>
+                      <a:pPr algn="l">
+                        <a:lnSpc>
+                          <a:spcPct val="100000"/>
+                        </a:lnSpc>
+                        <a:spcBef>
+                          <a:spcPts val="0"/>
+                        </a:spcBef>
+                        <a:spcAft>
+                          <a:spcPts val="0"/>
+                        </a:spcAft>
+                      </a:pPr>
+                      <a:r>
+                        <a:rPr sz="1300" b="1">
+                          <a:solidFill>
+                            <a:srgbClr val="1F1F1F"/>
+                          </a:solidFill>
+                          <a:latin typeface="Calibri"/>
+                        </a:rPr>
+                        <a:t>Inadimplência/PDD IME</a:t>
+                      </a:r>
+                    </a:p>
+                  </a:txBody>
+                  <a:tcPr marL="91440" marR="91440" marT="41148" marB="41148" anchor="ctr">
+                    <a:solidFill>
+                      <a:srgbClr val="FFFFFF"/>
+                    </a:solidFill>
+                    <a:lnL>
+                      <a:noFill/>
+                    </a:lnL>
+                    <a:lnR>
+                      <a:noFill/>
+                    </a:lnR>
+                    <a:lnT>
+                      <a:noFill/>
+                    </a:lnT>
+                    <a:lnB>
+                      <a:noFill/>
+                    </a:lnB>
+                  </a:tcPr>
+                </a:tc>
+                <a:tc>
+                  <a:txBody>
+                    <a:bodyPr wrap="square">
+                      <a:noAutofit/>
+                    </a:bodyPr>
+                    <a:lstStyle/>
                     <a:p>
                       <a:pPr algn="ctr">
                         <a:lnSpc>
@@ -7089,7 +8950,147 @@
                           </a:solidFill>
                           <a:latin typeface="Calibri"/>
                         </a:rPr>
-                        <a:t>circulação.</a:t>
+                        <a:t>Over 30/60/90/180/crédito e PDD/crédito: proxies agregados; gatilhos contratuais exigem fórmula</a:t>
+                      </a:r>
+                    </a:p>
+                    <a:p>
+                      <a:pPr algn="ctr">
+                        <a:lnSpc>
+                          <a:spcPct val="100000"/>
+                        </a:lnSpc>
+                        <a:spcBef>
+                          <a:spcPts val="0"/>
+                        </a:spcBef>
+                        <a:spcAft>
+                          <a:spcPts val="0"/>
+                        </a:spcAft>
+                      </a:pPr>
+                      <a:r>
+                        <a:rPr sz="1300" b="0">
+                          <a:solidFill>
+                            <a:srgbClr val="1F1F1F"/>
+                          </a:solidFill>
+                          <a:latin typeface="Calibri"/>
+                        </a:rPr>
+                        <a:t>própria.</a:t>
+                      </a:r>
+                    </a:p>
+                  </a:txBody>
+                  <a:tcPr marL="91440" marR="91440" marT="41148" marB="41148" anchor="ctr">
+                    <a:solidFill>
+                      <a:srgbClr val="FFFFFF"/>
+                    </a:solidFill>
+                    <a:lnL>
+                      <a:noFill/>
+                    </a:lnL>
+                    <a:lnR>
+                      <a:noFill/>
+                    </a:lnR>
+                    <a:lnT>
+                      <a:noFill/>
+                    </a:lnT>
+                    <a:lnB>
+                      <a:noFill/>
+                    </a:lnB>
+                  </a:tcPr>
+                </a:tc>
+              </a:tr>
+              <a:tr h="470916">
+                <a:tc>
+                  <a:txBody>
+                    <a:bodyPr wrap="square">
+                      <a:noAutofit/>
+                    </a:bodyPr>
+                    <a:lstStyle/>
+                    <a:p>
+                      <a:pPr algn="l">
+                        <a:lnSpc>
+                          <a:spcPct val="100000"/>
+                        </a:lnSpc>
+                        <a:spcBef>
+                          <a:spcPts val="0"/>
+                        </a:spcBef>
+                        <a:spcAft>
+                          <a:spcPts val="0"/>
+                        </a:spcAft>
+                      </a:pPr>
+                      <a:r>
+                        <a:rPr sz="1300" b="1">
+                          <a:solidFill>
+                            <a:srgbClr val="1F1F1F"/>
+                          </a:solidFill>
+                          <a:latin typeface="Calibri"/>
+                        </a:rPr>
+                        <a:t>Controles documentais</a:t>
+                      </a:r>
+                    </a:p>
+                  </a:txBody>
+                  <a:tcPr marL="91440" marR="91440" marT="41148" marB="41148" anchor="ctr">
+                    <a:solidFill>
+                      <a:srgbClr val="FFFFFF"/>
+                    </a:solidFill>
+                    <a:lnL>
+                      <a:noFill/>
+                    </a:lnL>
+                    <a:lnR>
+                      <a:noFill/>
+                    </a:lnR>
+                    <a:lnT>
+                      <a:noFill/>
+                    </a:lnT>
+                    <a:lnB>
+                      <a:noFill/>
+                    </a:lnB>
+                  </a:tcPr>
+                </a:tc>
+                <a:tc>
+                  <a:txBody>
+                    <a:bodyPr wrap="square">
+                      <a:noAutofit/>
+                    </a:bodyPr>
+                    <a:lstStyle/>
+                    <a:p>
+                      <a:pPr algn="ctr">
+                        <a:lnSpc>
+                          <a:spcPct val="100000"/>
+                        </a:lnSpc>
+                        <a:spcBef>
+                          <a:spcPts val="0"/>
+                        </a:spcBef>
+                        <a:spcAft>
+                          <a:spcPts val="0"/>
+                        </a:spcAft>
+                      </a:pPr>
+                      <a:r>
+                        <a:rPr sz="1300" b="0">
+                          <a:solidFill>
+                            <a:srgbClr val="1F1F1F"/>
+                          </a:solidFill>
+                          <a:latin typeface="Calibri"/>
+                        </a:rPr>
+                        <a:t>Elegibilidade, concentração individual, lastro, finalidade do hedge e troca de prestadores exigem</a:t>
+                      </a:r>
+                    </a:p>
+                    <a:p>
+                      <a:pPr algn="ctr">
+                        <a:lnSpc>
+                          <a:spcPct val="100000"/>
+                        </a:lnSpc>
+                        <a:spcBef>
+                          <a:spcPts val="0"/>
+                        </a:spcBef>
+                        <a:spcAft>
+                          <a:spcPts val="0"/>
+                        </a:spcAft>
+                      </a:pPr>
+                      <a:r>
+                        <a:rPr sz="1300" b="0">
+                          <a:solidFill>
+                            <a:srgbClr val="1F1F1F"/>
+                          </a:solidFill>
+                          <a:latin typeface="Calibri"/>
+                        </a:rPr>
+                        <a:t>controle documental.</a:t>
                       </a:r>
                     </a:p>
                   </a:txBody>
@@ -7138,221 +9139,7 @@
                           </a:solidFill>
                           <a:latin typeface="Calibri"/>
                         </a:rPr>
-                        <a:t>Remuneração</a:t>
-                      </a:r>
-                    </a:p>
-                  </a:txBody>
-                  <a:tcPr marL="91440" marR="91440" marT="41148" marB="41148" anchor="ctr">
-                    <a:solidFill>
-                      <a:srgbClr val="FFFFFF"/>
-                    </a:solidFill>
-                    <a:lnL>
-                      <a:noFill/>
-                    </a:lnL>
-                    <a:lnR>
-                      <a:noFill/>
-                    </a:lnR>
-                    <a:lnT>
-                      <a:noFill/>
-                    </a:lnT>
-                    <a:lnB>
-                      <a:noFill/>
-                    </a:lnB>
-                  </a:tcPr>
-                </a:tc>
-                <a:tc>
-                  <a:txBody>
-                    <a:bodyPr wrap="square">
-                      <a:noAutofit/>
-                    </a:bodyPr>
-                    <a:lstStyle/>
-                    <a:p>
-                      <a:pPr algn="ctr">
-                        <a:lnSpc>
-                          <a:spcPct val="100000"/>
-                        </a:lnSpc>
-                        <a:spcBef>
-                          <a:spcPts val="0"/>
-                        </a:spcBef>
-                        <a:spcAft>
-                          <a:spcPts val="0"/>
-                        </a:spcAft>
-                      </a:pPr>
-                      <a:r>
-                        <a:rPr sz="1300" b="0">
-                          <a:solidFill>
-                            <a:srgbClr val="1F1F1F"/>
-                          </a:solidFill>
-                          <a:latin typeface="Calibri"/>
-                        </a:rPr>
-                        <a:t>Spread final não localizado; taxa e benchmark remetidos ao apêndice/suplemento de cada série.</a:t>
-                      </a:r>
-                    </a:p>
-                  </a:txBody>
-                  <a:tcPr marL="91440" marR="91440" marT="41148" marB="41148" anchor="ctr">
-                    <a:solidFill>
-                      <a:srgbClr val="FFFFFF"/>
-                    </a:solidFill>
-                    <a:lnL>
-                      <a:noFill/>
-                    </a:lnL>
-                    <a:lnR>
-                      <a:noFill/>
-                    </a:lnR>
-                    <a:lnT>
-                      <a:noFill/>
-                    </a:lnT>
-                    <a:lnB>
-                      <a:noFill/>
-                    </a:lnB>
-                  </a:tcPr>
-                </a:tc>
-              </a:tr>
-              <a:tr h="470916">
-                <a:tc>
-                  <a:txBody>
-                    <a:bodyPr wrap="square">
-                      <a:noAutofit/>
-                    </a:bodyPr>
-                    <a:lstStyle/>
-                    <a:p>
-                      <a:pPr algn="l">
-                        <a:lnSpc>
-                          <a:spcPct val="100000"/>
-                        </a:lnSpc>
-                        <a:spcBef>
-                          <a:spcPts val="0"/>
-                        </a:spcBef>
-                        <a:spcAft>
-                          <a:spcPts val="0"/>
-                        </a:spcAft>
-                      </a:pPr>
-                      <a:r>
-                        <a:rPr sz="1300" b="1">
-                          <a:solidFill>
-                            <a:srgbClr val="1F1F1F"/>
-                          </a:solidFill>
-                          <a:latin typeface="Calibri"/>
-                        </a:rPr>
-                        <a:t>Volume/VNU</a:t>
-                      </a:r>
-                    </a:p>
-                  </a:txBody>
-                  <a:tcPr marL="91440" marR="91440" marT="41148" marB="41148" anchor="ctr">
-                    <a:solidFill>
-                      <a:srgbClr val="FFFFFF"/>
-                    </a:solidFill>
-                    <a:lnL>
-                      <a:noFill/>
-                    </a:lnL>
-                    <a:lnR>
-                      <a:noFill/>
-                    </a:lnR>
-                    <a:lnT>
-                      <a:noFill/>
-                    </a:lnT>
-                    <a:lnB>
-                      <a:noFill/>
-                    </a:lnB>
-                  </a:tcPr>
-                </a:tc>
-                <a:tc>
-                  <a:txBody>
-                    <a:bodyPr wrap="square">
-                      <a:noAutofit/>
-                    </a:bodyPr>
-                    <a:lstStyle/>
-                    <a:p>
-                      <a:pPr algn="ctr">
-                        <a:lnSpc>
-                          <a:spcPct val="100000"/>
-                        </a:lnSpc>
-                        <a:spcBef>
-                          <a:spcPts val="0"/>
-                        </a:spcBef>
-                        <a:spcAft>
-                          <a:spcPts val="0"/>
-                        </a:spcAft>
-                      </a:pPr>
-                      <a:r>
-                        <a:rPr sz="1300" b="0">
-                          <a:solidFill>
-                            <a:srgbClr val="1F1F1F"/>
-                          </a:solidFill>
-                          <a:latin typeface="Calibri"/>
-                        </a:rPr>
-                        <a:t>Volume aprovado/distribuído por série não confirmado pelos modelos; VNU depende do suplemento</a:t>
-                      </a:r>
-                    </a:p>
-                    <a:p>
-                      <a:pPr algn="ctr">
-                        <a:lnSpc>
-                          <a:spcPct val="100000"/>
-                        </a:lnSpc>
-                        <a:spcBef>
-                          <a:spcPts val="0"/>
-                        </a:spcBef>
-                        <a:spcAft>
-                          <a:spcPts val="0"/>
-                        </a:spcAft>
-                      </a:pPr>
-                      <a:r>
-                        <a:rPr sz="1300" b="0">
-                          <a:solidFill>
-                            <a:srgbClr val="1F1F1F"/>
-                          </a:solidFill>
-                          <a:latin typeface="Calibri"/>
-                        </a:rPr>
-                        <a:t>preenchido.</a:t>
-                      </a:r>
-                    </a:p>
-                  </a:txBody>
-                  <a:tcPr marL="91440" marR="91440" marT="41148" marB="41148" anchor="ctr">
-                    <a:solidFill>
-                      <a:srgbClr val="FFFFFF"/>
-                    </a:solidFill>
-                    <a:lnL>
-                      <a:noFill/>
-                    </a:lnL>
-                    <a:lnR>
-                      <a:noFill/>
-                    </a:lnR>
-                    <a:lnT>
-                      <a:noFill/>
-                    </a:lnT>
-                    <a:lnB>
-                      <a:noFill/>
-                    </a:lnB>
-                  </a:tcPr>
-                </a:tc>
-              </a:tr>
-              <a:tr h="470916">
-                <a:tc>
-                  <a:txBody>
-                    <a:bodyPr wrap="square">
-                      <a:noAutofit/>
-                    </a:bodyPr>
-                    <a:lstStyle/>
-                    <a:p>
-                      <a:pPr algn="l">
-                        <a:lnSpc>
-                          <a:spcPct val="100000"/>
-                        </a:lnSpc>
-                        <a:spcBef>
-                          <a:spcPts val="0"/>
-                        </a:spcBef>
-                        <a:spcAft>
-                          <a:spcPts val="0"/>
-                        </a:spcAft>
-                      </a:pPr>
-                      <a:r>
-                        <a:rPr sz="1300" b="1">
-                          <a:solidFill>
-                            <a:srgbClr val="1F1F1F"/>
-                          </a:solidFill>
-                          <a:latin typeface="Calibri"/>
-                        </a:rPr>
-                        <a:t>Ofertas</a:t>
+                        <a:t>Competência IME</a:t>
                       </a:r>
                     </a:p>
                   </a:txBody>
@@ -7401,1838 +9188,7 @@
                           </a:solidFill>
                           <a:latin typeface="Calibri"/>
                         </a:rPr>
-                        <a:t>Rito, público e montante por emissão remetidos aos respectivos atos e anúncios; encerramentos não</a:t>
-                      </a:r>
-                    </a:p>
-                    <a:p>
-                      <a:pPr algn="ctr">
-                        <a:lnSpc>
-                          <a:spcPct val="100000"/>
-                        </a:lnSpc>
-                        <a:spcBef>
-                          <a:spcPts val="0"/>
-                        </a:spcBef>
-                        <a:spcAft>
-                          <a:spcPts val="0"/>
-                        </a:spcAft>
-                      </a:pPr>
-                      <a:r>
-                        <a:rPr sz="1300" b="0">
-                          <a:solidFill>
-                            <a:srgbClr val="1F1F1F"/>
-                          </a:solidFill>
-                          <a:latin typeface="Calibri"/>
-                        </a:rPr>
-                        <a:t>confirmados.</a:t>
-                      </a:r>
-                    </a:p>
-                  </a:txBody>
-                  <a:tcPr marL="91440" marR="91440" marT="41148" marB="41148" anchor="ctr">
-                    <a:solidFill>
-                      <a:srgbClr val="FFFFFF"/>
-                    </a:solidFill>
-                    <a:lnL>
-                      <a:noFill/>
-                    </a:lnL>
-                    <a:lnR>
-                      <a:noFill/>
-                    </a:lnR>
-                    <a:lnT>
-                      <a:noFill/>
-                    </a:lnT>
-                    <a:lnB w="6350">
-                      <a:solidFill>
-                        <a:srgbClr val="D9DEE5"/>
-                      </a:solidFill>
-                    </a:lnB>
-                  </a:tcPr>
-                </a:tc>
-              </a:tr>
-            </a:tbl>
-          </a:graphicData>
-        </a:graphic>
-      </p:graphicFrame>
-      <p:sp>
-        <p:nvSpPr>
-          <p:cNvPr id="4" name="TextBox 3"/>
-          <p:cNvSpPr txBox="1"/>
-          <p:nvPr/>
-        </p:nvSpPr>
-        <p:spPr>
-          <a:xfrm>
-            <a:off x="438912" y="6428232"/>
-            <a:ext cx="10399471" cy="164592"/>
-          </a:xfrm>
-          <a:prstGeom prst="rect">
-            <a:avLst/>
-          </a:prstGeom>
-          <a:noFill/>
-        </p:spPr>
-        <p:txBody>
-          <a:bodyPr wrap="square" lIns="0" rIns="0" tIns="0" bIns="0">
-            <a:noAutofit/>
-          </a:bodyPr>
-          <a:lstStyle/>
-          <a:p>
-            <a:pPr algn="l"/>
-            <a:r>
-              <a:rPr sz="850" b="0">
-                <a:solidFill>
-                  <a:srgbClr val="6B7280"/>
-                </a:solidFill>
-                <a:latin typeface="Calibri"/>
-              </a:rPr>
-              <a:t>Leitura documental: 07/10/2026. Fontes e referências nas notas do slide.</a:t>
-            </a:r>
-          </a:p>
-        </p:txBody>
-      </p:sp>
-      <p:sp>
-        <p:nvSpPr>
-          <p:cNvPr id="5" name="TextBox 4"/>
-          <p:cNvSpPr txBox="1"/>
-          <p:nvPr/>
-        </p:nvSpPr>
-        <p:spPr>
-          <a:xfrm>
-            <a:off x="11112703" y="6428232"/>
-            <a:ext cx="640080" cy="164592"/>
-          </a:xfrm>
-          <a:prstGeom prst="rect">
-            <a:avLst/>
-          </a:prstGeom>
-          <a:noFill/>
-        </p:spPr>
-        <p:txBody>
-          <a:bodyPr wrap="square" lIns="0" rIns="0" tIns="0" bIns="0">
-            <a:noAutofit/>
-          </a:bodyPr>
-          <a:lstStyle/>
-          <a:p>
-            <a:pPr algn="r"/>
-            <a:r>
-              <a:rPr sz="850" b="0">
-                <a:solidFill>
-                  <a:srgbClr val="6B7280"/>
-                </a:solidFill>
-                <a:latin typeface="Calibri"/>
-              </a:rPr>
-              <a:t>4/7</a:t>
-            </a:r>
-          </a:p>
-        </p:txBody>
-      </p:sp>
-    </p:spTree>
-  </p:cSld>
-  <p:clrMapOvr>
-    <a:masterClrMapping/>
-  </p:clrMapOvr>
-</p:sld>
-</file>
-
-<file path=ppt/slides/slide5.xml><?xml version="1.0" encoding="utf-8"?>
-<p:sld xmlns:a="http://schemas.openxmlformats.org/drawingml/2006/main" xmlns:p="http://schemas.openxmlformats.org/presentationml/2006/main" xmlns:r="http://schemas.openxmlformats.org/officeDocument/2006/relationships">
-  <p:cSld>
-    <p:bg>
-      <p:bgPr>
-        <a:solidFill>
-          <a:srgbClr val="FFFFFF"/>
-        </a:solidFill>
-        <a:effectLst/>
-      </p:bgPr>
-    </p:bg>
-    <p:spTree>
-      <p:nvGrpSpPr>
-        <p:cNvPr id="1" name=""/>
-        <p:cNvGrpSpPr/>
-        <p:nvPr/>
-      </p:nvGrpSpPr>
-      <p:grpSpPr/>
-      <p:sp>
-        <p:nvSpPr>
-          <p:cNvPr id="2" name="TextBox 1"/>
-          <p:cNvSpPr txBox="1"/>
-          <p:nvPr/>
-        </p:nvSpPr>
-        <p:spPr>
-          <a:xfrm>
-            <a:off x="438912" y="292608"/>
-            <a:ext cx="11313871" cy="557784"/>
-          </a:xfrm>
-          <a:prstGeom prst="rect">
-            <a:avLst/>
-          </a:prstGeom>
-          <a:noFill/>
-        </p:spPr>
-        <p:txBody>
-          <a:bodyPr wrap="square" lIns="0" rIns="0" tIns="0" bIns="0">
-            <a:noAutofit/>
-          </a:bodyPr>
-          <a:lstStyle/>
-          <a:p>
-            <a:pPr algn="l"/>
-            <a:r>
-              <a:rPr sz="2300" b="1">
-                <a:solidFill>
-                  <a:srgbClr val="EC7000"/>
-                </a:solidFill>
-                <a:latin typeface="Calibri"/>
-              </a:rPr>
-              <a:t>Curadoria FIDC Solfacil VI – Amortização e calendário de pagamentos</a:t>
-            </a:r>
-          </a:p>
-        </p:txBody>
-      </p:sp>
-      <p:graphicFrame>
-        <p:nvGraphicFramePr>
-          <p:cNvPr id="3" name="Table 2"/>
-          <p:cNvGraphicFramePr>
-            <a:graphicFrameLocks noGrp="1"/>
-          </p:cNvGraphicFramePr>
-          <p:nvPr/>
-        </p:nvGraphicFramePr>
-        <p:xfrm>
-          <a:off x="438912" y="932688"/>
-          <a:ext cx="11313871" cy="1243584"/>
-        </p:xfrm>
-        <a:graphic>
-          <a:graphicData uri="http://schemas.openxmlformats.org/drawingml/2006/table">
-            <a:tbl>
-              <a:tblPr>
-                <a:tableStyleId>{5C22544A-7EE6-4342-B048-85BDC9FD1C3A}</a:tableStyleId>
-              </a:tblPr>
-              <a:tblGrid>
-                <a:gridCol w="2331720"/>
-                <a:gridCol w="8982151"/>
-              </a:tblGrid>
-              <a:tr h="393192">
-                <a:tc>
-                  <a:txBody>
-                    <a:bodyPr wrap="square">
-                      <a:noAutofit/>
-                    </a:bodyPr>
-                    <a:lstStyle/>
-                    <a:p>
-                      <a:pPr algn="l">
-                        <a:lnSpc>
-                          <a:spcPct val="100000"/>
-                        </a:lnSpc>
-                        <a:spcBef>
-                          <a:spcPts val="0"/>
-                        </a:spcBef>
-                        <a:spcAft>
-                          <a:spcPts val="0"/>
-                        </a:spcAft>
-                      </a:pPr>
-                      <a:r>
-                        <a:rPr sz="1300" b="1">
-                          <a:solidFill>
-                            <a:srgbClr val="1F1F1F"/>
-                          </a:solidFill>
-                          <a:latin typeface="Calibri"/>
-                        </a:rPr>
-                        <a:t>Critério</a:t>
-                      </a:r>
-                    </a:p>
-                  </a:txBody>
-                  <a:tcPr marL="91440" marR="91440" marT="41148" marB="41148" anchor="ctr">
-                    <a:solidFill>
-                      <a:srgbClr val="EC7000"/>
-                    </a:solidFill>
-                    <a:lnL>
-                      <a:noFill/>
-                    </a:lnL>
-                    <a:lnR>
-                      <a:noFill/>
-                    </a:lnR>
-                    <a:lnT>
-                      <a:noFill/>
-                    </a:lnT>
-                    <a:lnB w="6350">
-                      <a:solidFill>
-                        <a:srgbClr val="D9DEE5"/>
-                      </a:solidFill>
-                    </a:lnB>
-                  </a:tcPr>
-                </a:tc>
-                <a:tc>
-                  <a:txBody>
-                    <a:bodyPr wrap="square">
-                      <a:noAutofit/>
-                    </a:bodyPr>
-                    <a:lstStyle/>
-                    <a:p>
-                      <a:pPr algn="ctr">
-                        <a:lnSpc>
-                          <a:spcPct val="100000"/>
-                        </a:lnSpc>
-                        <a:spcBef>
-                          <a:spcPts val="0"/>
-                        </a:spcBef>
-                        <a:spcAft>
-                          <a:spcPts val="0"/>
-                        </a:spcAft>
-                      </a:pPr>
-                      <a:r>
-                        <a:rPr sz="1300" b="1">
-                          <a:solidFill>
-                            <a:srgbClr val="1F1F1F"/>
-                          </a:solidFill>
-                          <a:latin typeface="Calibri"/>
-                        </a:rPr>
-                        <a:t>Solfácil VI</a:t>
-                      </a:r>
-                    </a:p>
-                  </a:txBody>
-                  <a:tcPr marL="91440" marR="91440" marT="41148" marB="41148" anchor="ctr">
-                    <a:solidFill>
-                      <a:srgbClr val="EC7000"/>
-                    </a:solidFill>
-                    <a:lnL>
-                      <a:noFill/>
-                    </a:lnL>
-                    <a:lnR>
-                      <a:noFill/>
-                    </a:lnR>
-                    <a:lnT>
-                      <a:noFill/>
-                    </a:lnT>
-                    <a:lnB w="6350">
-                      <a:solidFill>
-                        <a:srgbClr val="D9DEE5"/>
-                      </a:solidFill>
-                    </a:lnB>
-                  </a:tcPr>
-                </a:tc>
-              </a:tr>
-              <a:tr h="283464">
-                <a:tc>
-                  <a:txBody>
-                    <a:bodyPr wrap="square">
-                      <a:noAutofit/>
-                    </a:bodyPr>
-                    <a:lstStyle/>
-                    <a:p>
-                      <a:pPr algn="l">
-                        <a:lnSpc>
-                          <a:spcPct val="100000"/>
-                        </a:lnSpc>
-                        <a:spcBef>
-                          <a:spcPts val="0"/>
-                        </a:spcBef>
-                        <a:spcAft>
-                          <a:spcPts val="0"/>
-                        </a:spcAft>
-                      </a:pPr>
-                      <a:r>
-                        <a:rPr sz="1300" b="1">
-                          <a:solidFill>
-                            <a:srgbClr val="1F1F1F"/>
-                          </a:solidFill>
-                          <a:latin typeface="Calibri"/>
-                        </a:rPr>
-                        <a:t>Carência</a:t>
-                      </a:r>
-                    </a:p>
-                  </a:txBody>
-                  <a:tcPr marL="91440" marR="91440" marT="41148" marB="41148" anchor="ctr">
-                    <a:solidFill>
-                      <a:srgbClr val="FFFFFF"/>
-                    </a:solidFill>
-                    <a:lnL>
-                      <a:noFill/>
-                    </a:lnL>
-                    <a:lnR>
-                      <a:noFill/>
-                    </a:lnR>
-                    <a:lnT>
-                      <a:noFill/>
-                    </a:lnT>
-                    <a:lnB>
-                      <a:noFill/>
-                    </a:lnB>
-                  </a:tcPr>
-                </a:tc>
-                <a:tc>
-                  <a:txBody>
-                    <a:bodyPr wrap="square">
-                      <a:noAutofit/>
-                    </a:bodyPr>
-                    <a:lstStyle/>
-                    <a:p>
-                      <a:pPr algn="ctr">
-                        <a:lnSpc>
-                          <a:spcPct val="100000"/>
-                        </a:lnSpc>
-                        <a:spcBef>
-                          <a:spcPts val="0"/>
-                        </a:spcBef>
-                        <a:spcAft>
-                          <a:spcPts val="0"/>
-                        </a:spcAft>
-                      </a:pPr>
-                      <a:r>
-                        <a:rPr sz="1300" b="0">
-                          <a:solidFill>
-                            <a:srgbClr val="1F1F1F"/>
-                          </a:solidFill>
-                          <a:latin typeface="Calibri"/>
-                        </a:rPr>
-                        <a:t>Prazo remetido ao suplemento; carência efetiva por série não confirmada.</a:t>
-                      </a:r>
-                    </a:p>
-                  </a:txBody>
-                  <a:tcPr marL="91440" marR="91440" marT="41148" marB="41148" anchor="ctr">
-                    <a:solidFill>
-                      <a:srgbClr val="FFFFFF"/>
-                    </a:solidFill>
-                    <a:lnL>
-                      <a:noFill/>
-                    </a:lnL>
-                    <a:lnR>
-                      <a:noFill/>
-                    </a:lnR>
-                    <a:lnT>
-                      <a:noFill/>
-                    </a:lnT>
-                    <a:lnB>
-                      <a:noFill/>
-                    </a:lnB>
-                  </a:tcPr>
-                </a:tc>
-              </a:tr>
-              <a:tr h="283464">
-                <a:tc>
-                  <a:txBody>
-                    <a:bodyPr wrap="square">
-                      <a:noAutofit/>
-                    </a:bodyPr>
-                    <a:lstStyle/>
-                    <a:p>
-                      <a:pPr algn="l">
-                        <a:lnSpc>
-                          <a:spcPct val="100000"/>
-                        </a:lnSpc>
-                        <a:spcBef>
-                          <a:spcPts val="0"/>
-                        </a:spcBef>
-                        <a:spcAft>
-                          <a:spcPts val="0"/>
-                        </a:spcAft>
-                      </a:pPr>
-                      <a:r>
-                        <a:rPr sz="1300" b="1">
-                          <a:solidFill>
-                            <a:srgbClr val="1F1F1F"/>
-                          </a:solidFill>
-                          <a:latin typeface="Calibri"/>
-                        </a:rPr>
-                        <a:t>Juros/amortização</a:t>
-                      </a:r>
-                    </a:p>
-                  </a:txBody>
-                  <a:tcPr marL="91440" marR="91440" marT="41148" marB="41148" anchor="ctr">
-                    <a:solidFill>
-                      <a:srgbClr val="FFFFFF"/>
-                    </a:solidFill>
-                    <a:lnL>
-                      <a:noFill/>
-                    </a:lnL>
-                    <a:lnR>
-                      <a:noFill/>
-                    </a:lnR>
-                    <a:lnT>
-                      <a:noFill/>
-                    </a:lnT>
-                    <a:lnB>
-                      <a:noFill/>
-                    </a:lnB>
-                  </a:tcPr>
-                </a:tc>
-                <a:tc>
-                  <a:txBody>
-                    <a:bodyPr wrap="square">
-                      <a:noAutofit/>
-                    </a:bodyPr>
-                    <a:lstStyle/>
-                    <a:p>
-                      <a:pPr algn="ctr">
-                        <a:lnSpc>
-                          <a:spcPct val="100000"/>
-                        </a:lnSpc>
-                        <a:spcBef>
-                          <a:spcPts val="0"/>
-                        </a:spcBef>
-                        <a:spcAft>
-                          <a:spcPts val="0"/>
-                        </a:spcAft>
-                      </a:pPr>
-                      <a:r>
-                        <a:rPr sz="1300" b="0">
-                          <a:solidFill>
-                            <a:srgbClr val="1F1F1F"/>
-                          </a:solidFill>
-                          <a:latin typeface="Calibri"/>
-                        </a:rPr>
-                        <a:t>Pagamentos sujeitos à disponibilidade de caixa e waterfall; cronograma fechado não identificado.</a:t>
-                      </a:r>
-                    </a:p>
-                  </a:txBody>
-                  <a:tcPr marL="91440" marR="91440" marT="41148" marB="41148" anchor="ctr">
-                    <a:solidFill>
-                      <a:srgbClr val="FFFFFF"/>
-                    </a:solidFill>
-                    <a:lnL>
-                      <a:noFill/>
-                    </a:lnL>
-                    <a:lnR>
-                      <a:noFill/>
-                    </a:lnR>
-                    <a:lnT>
-                      <a:noFill/>
-                    </a:lnT>
-                    <a:lnB>
-                      <a:noFill/>
-                    </a:lnB>
-                  </a:tcPr>
-                </a:tc>
-              </a:tr>
-              <a:tr h="283464">
-                <a:tc>
-                  <a:txBody>
-                    <a:bodyPr wrap="square">
-                      <a:noAutofit/>
-                    </a:bodyPr>
-                    <a:lstStyle/>
-                    <a:p>
-                      <a:pPr algn="l">
-                        <a:lnSpc>
-                          <a:spcPct val="100000"/>
-                        </a:lnSpc>
-                        <a:spcBef>
-                          <a:spcPts val="0"/>
-                        </a:spcBef>
-                        <a:spcAft>
-                          <a:spcPts val="0"/>
-                        </a:spcAft>
-                      </a:pPr>
-                      <a:r>
-                        <a:rPr sz="1300" b="1">
-                          <a:solidFill>
-                            <a:srgbClr val="1F1F1F"/>
-                          </a:solidFill>
-                          <a:latin typeface="Calibri"/>
-                        </a:rPr>
-                        <a:t>Vencimento</a:t>
-                      </a:r>
-                    </a:p>
-                  </a:txBody>
-                  <a:tcPr marL="91440" marR="91440" marT="41148" marB="41148" anchor="ctr">
-                    <a:solidFill>
-                      <a:srgbClr val="FFFFFF"/>
-                    </a:solidFill>
-                    <a:lnL>
-                      <a:noFill/>
-                    </a:lnL>
-                    <a:lnR>
-                      <a:noFill/>
-                    </a:lnR>
-                    <a:lnT>
-                      <a:noFill/>
-                    </a:lnT>
-                    <a:lnB w="6350">
-                      <a:solidFill>
-                        <a:srgbClr val="D9DEE5"/>
-                      </a:solidFill>
-                    </a:lnB>
-                  </a:tcPr>
-                </a:tc>
-                <a:tc>
-                  <a:txBody>
-                    <a:bodyPr wrap="square">
-                      <a:noAutofit/>
-                    </a:bodyPr>
-                    <a:lstStyle/>
-                    <a:p>
-                      <a:pPr algn="ctr">
-                        <a:lnSpc>
-                          <a:spcPct val="100000"/>
-                        </a:lnSpc>
-                        <a:spcBef>
-                          <a:spcPts val="0"/>
-                        </a:spcBef>
-                        <a:spcAft>
-                          <a:spcPts val="0"/>
-                        </a:spcAft>
-                      </a:pPr>
-                      <a:r>
-                        <a:rPr sz="1300" b="0">
-                          <a:solidFill>
-                            <a:srgbClr val="1F1F1F"/>
-                          </a:solidFill>
-                          <a:latin typeface="Calibri"/>
-                        </a:rPr>
-                        <a:t>Data final por série remetida ao suplemento; primeira integralização efetiva não confirmada.</a:t>
-                      </a:r>
-                    </a:p>
-                  </a:txBody>
-                  <a:tcPr marL="91440" marR="91440" marT="41148" marB="41148" anchor="ctr">
-                    <a:solidFill>
-                      <a:srgbClr val="FFFFFF"/>
-                    </a:solidFill>
-                    <a:lnL>
-                      <a:noFill/>
-                    </a:lnL>
-                    <a:lnR>
-                      <a:noFill/>
-                    </a:lnR>
-                    <a:lnT>
-                      <a:noFill/>
-                    </a:lnT>
-                    <a:lnB w="6350">
-                      <a:solidFill>
-                        <a:srgbClr val="D9DEE5"/>
-                      </a:solidFill>
-                    </a:lnB>
-                  </a:tcPr>
-                </a:tc>
-              </a:tr>
-            </a:tbl>
-          </a:graphicData>
-        </a:graphic>
-      </p:graphicFrame>
-      <p:sp>
-        <p:nvSpPr>
-          <p:cNvPr id="4" name="TextBox 3"/>
-          <p:cNvSpPr txBox="1"/>
-          <p:nvPr/>
-        </p:nvSpPr>
-        <p:spPr>
-          <a:xfrm>
-            <a:off x="438912" y="6428232"/>
-            <a:ext cx="10399471" cy="164592"/>
-          </a:xfrm>
-          <a:prstGeom prst="rect">
-            <a:avLst/>
-          </a:prstGeom>
-          <a:noFill/>
-        </p:spPr>
-        <p:txBody>
-          <a:bodyPr wrap="square" lIns="0" rIns="0" tIns="0" bIns="0">
-            <a:noAutofit/>
-          </a:bodyPr>
-          <a:lstStyle/>
-          <a:p>
-            <a:pPr algn="l"/>
-            <a:r>
-              <a:rPr sz="850" b="0">
-                <a:solidFill>
-                  <a:srgbClr val="6B7280"/>
-                </a:solidFill>
-                <a:latin typeface="Calibri"/>
-              </a:rPr>
-              <a:t>Leitura documental: 07/10/2026. Fontes e referências nas notas do slide.</a:t>
-            </a:r>
-          </a:p>
-        </p:txBody>
-      </p:sp>
-      <p:sp>
-        <p:nvSpPr>
-          <p:cNvPr id="5" name="TextBox 4"/>
-          <p:cNvSpPr txBox="1"/>
-          <p:nvPr/>
-        </p:nvSpPr>
-        <p:spPr>
-          <a:xfrm>
-            <a:off x="11112703" y="6428232"/>
-            <a:ext cx="640080" cy="164592"/>
-          </a:xfrm>
-          <a:prstGeom prst="rect">
-            <a:avLst/>
-          </a:prstGeom>
-          <a:noFill/>
-        </p:spPr>
-        <p:txBody>
-          <a:bodyPr wrap="square" lIns="0" rIns="0" tIns="0" bIns="0">
-            <a:noAutofit/>
-          </a:bodyPr>
-          <a:lstStyle/>
-          <a:p>
-            <a:pPr algn="r"/>
-            <a:r>
-              <a:rPr sz="850" b="0">
-                <a:solidFill>
-                  <a:srgbClr val="6B7280"/>
-                </a:solidFill>
-                <a:latin typeface="Calibri"/>
-              </a:rPr>
-              <a:t>5/7</a:t>
-            </a:r>
-          </a:p>
-        </p:txBody>
-      </p:sp>
-    </p:spTree>
-  </p:cSld>
-  <p:clrMapOvr>
-    <a:masterClrMapping/>
-  </p:clrMapOvr>
-</p:sld>
-</file>
-
-<file path=ppt/slides/slide6.xml><?xml version="1.0" encoding="utf-8"?>
-<p:sld xmlns:a="http://schemas.openxmlformats.org/drawingml/2006/main" xmlns:p="http://schemas.openxmlformats.org/presentationml/2006/main" xmlns:r="http://schemas.openxmlformats.org/officeDocument/2006/relationships">
-  <p:cSld>
-    <p:bg>
-      <p:bgPr>
-        <a:solidFill>
-          <a:srgbClr val="FFFFFF"/>
-        </a:solidFill>
-        <a:effectLst/>
-      </p:bgPr>
-    </p:bg>
-    <p:spTree>
-      <p:nvGrpSpPr>
-        <p:cNvPr id="1" name=""/>
-        <p:cNvGrpSpPr/>
-        <p:nvPr/>
-      </p:nvGrpSpPr>
-      <p:grpSpPr/>
-      <p:sp>
-        <p:nvSpPr>
-          <p:cNvPr id="2" name="TextBox 1"/>
-          <p:cNvSpPr txBox="1"/>
-          <p:nvPr/>
-        </p:nvSpPr>
-        <p:spPr>
-          <a:xfrm>
-            <a:off x="438912" y="292608"/>
-            <a:ext cx="11313871" cy="557784"/>
-          </a:xfrm>
-          <a:prstGeom prst="rect">
-            <a:avLst/>
-          </a:prstGeom>
-          <a:noFill/>
-        </p:spPr>
-        <p:txBody>
-          <a:bodyPr wrap="square" lIns="0" rIns="0" tIns="0" bIns="0">
-            <a:noAutofit/>
-          </a:bodyPr>
-          <a:lstStyle/>
-          <a:p>
-            <a:pPr algn="l"/>
-            <a:r>
-              <a:rPr sz="2300" b="1">
-                <a:solidFill>
-                  <a:srgbClr val="EC7000"/>
-                </a:solidFill>
-                <a:latin typeface="Calibri"/>
-              </a:rPr>
-              <a:t>Curadoria FIDC Solfacil VI – Custos estruturais</a:t>
-            </a:r>
-          </a:p>
-        </p:txBody>
-      </p:sp>
-      <p:graphicFrame>
-        <p:nvGraphicFramePr>
-          <p:cNvPr id="3" name="Table 2"/>
-          <p:cNvGraphicFramePr>
-            <a:graphicFrameLocks noGrp="1"/>
-          </p:cNvGraphicFramePr>
-          <p:nvPr/>
-        </p:nvGraphicFramePr>
-        <p:xfrm>
-          <a:off x="438912" y="932688"/>
-          <a:ext cx="11313871" cy="1243584"/>
-        </p:xfrm>
-        <a:graphic>
-          <a:graphicData uri="http://schemas.openxmlformats.org/drawingml/2006/table">
-            <a:tbl>
-              <a:tblPr>
-                <a:tableStyleId>{5C22544A-7EE6-4342-B048-85BDC9FD1C3A}</a:tableStyleId>
-              </a:tblPr>
-              <a:tblGrid>
-                <a:gridCol w="2331720"/>
-                <a:gridCol w="8982151"/>
-              </a:tblGrid>
-              <a:tr h="393192">
-                <a:tc>
-                  <a:txBody>
-                    <a:bodyPr wrap="square">
-                      <a:noAutofit/>
-                    </a:bodyPr>
-                    <a:lstStyle/>
-                    <a:p>
-                      <a:pPr algn="l">
-                        <a:lnSpc>
-                          <a:spcPct val="100000"/>
-                        </a:lnSpc>
-                        <a:spcBef>
-                          <a:spcPts val="0"/>
-                        </a:spcBef>
-                        <a:spcAft>
-                          <a:spcPts val="0"/>
-                        </a:spcAft>
-                      </a:pPr>
-                      <a:r>
-                        <a:rPr sz="1300" b="1">
-                          <a:solidFill>
-                            <a:srgbClr val="1F1F1F"/>
-                          </a:solidFill>
-                          <a:latin typeface="Calibri"/>
-                        </a:rPr>
-                        <a:t>Critério</a:t>
-                      </a:r>
-                    </a:p>
-                  </a:txBody>
-                  <a:tcPr marL="91440" marR="91440" marT="41148" marB="41148" anchor="ctr">
-                    <a:solidFill>
-                      <a:srgbClr val="EC7000"/>
-                    </a:solidFill>
-                    <a:lnL>
-                      <a:noFill/>
-                    </a:lnL>
-                    <a:lnR>
-                      <a:noFill/>
-                    </a:lnR>
-                    <a:lnT>
-                      <a:noFill/>
-                    </a:lnT>
-                    <a:lnB w="6350">
-                      <a:solidFill>
-                        <a:srgbClr val="D9DEE5"/>
-                      </a:solidFill>
-                    </a:lnB>
-                  </a:tcPr>
-                </a:tc>
-                <a:tc>
-                  <a:txBody>
-                    <a:bodyPr wrap="square">
-                      <a:noAutofit/>
-                    </a:bodyPr>
-                    <a:lstStyle/>
-                    <a:p>
-                      <a:pPr algn="ctr">
-                        <a:lnSpc>
-                          <a:spcPct val="100000"/>
-                        </a:lnSpc>
-                        <a:spcBef>
-                          <a:spcPts val="0"/>
-                        </a:spcBef>
-                        <a:spcAft>
-                          <a:spcPts val="0"/>
-                        </a:spcAft>
-                      </a:pPr>
-                      <a:r>
-                        <a:rPr sz="1300" b="1">
-                          <a:solidFill>
-                            <a:srgbClr val="1F1F1F"/>
-                          </a:solidFill>
-                          <a:latin typeface="Calibri"/>
-                        </a:rPr>
-                        <a:t>Solfácil VI</a:t>
-                      </a:r>
-                    </a:p>
-                  </a:txBody>
-                  <a:tcPr marL="91440" marR="91440" marT="41148" marB="41148" anchor="ctr">
-                    <a:solidFill>
-                      <a:srgbClr val="EC7000"/>
-                    </a:solidFill>
-                    <a:lnL>
-                      <a:noFill/>
-                    </a:lnL>
-                    <a:lnR>
-                      <a:noFill/>
-                    </a:lnR>
-                    <a:lnT>
-                      <a:noFill/>
-                    </a:lnT>
-                    <a:lnB w="6350">
-                      <a:solidFill>
-                        <a:srgbClr val="D9DEE5"/>
-                      </a:solidFill>
-                    </a:lnB>
-                  </a:tcPr>
-                </a:tc>
-              </a:tr>
-              <a:tr h="283464">
-                <a:tc>
-                  <a:txBody>
-                    <a:bodyPr wrap="square">
-                      <a:noAutofit/>
-                    </a:bodyPr>
-                    <a:lstStyle/>
-                    <a:p>
-                      <a:pPr algn="l">
-                        <a:lnSpc>
-                          <a:spcPct val="100000"/>
-                        </a:lnSpc>
-                        <a:spcBef>
-                          <a:spcPts val="0"/>
-                        </a:spcBef>
-                        <a:spcAft>
-                          <a:spcPts val="0"/>
-                        </a:spcAft>
-                      </a:pPr>
-                      <a:r>
-                        <a:rPr sz="1300" b="1">
-                          <a:solidFill>
-                            <a:srgbClr val="1F1F1F"/>
-                          </a:solidFill>
-                          <a:latin typeface="Calibri"/>
-                        </a:rPr>
-                        <a:t>Administração</a:t>
-                      </a:r>
-                    </a:p>
-                  </a:txBody>
-                  <a:tcPr marL="91440" marR="91440" marT="41148" marB="41148" anchor="ctr">
-                    <a:solidFill>
-                      <a:srgbClr val="FFFFFF"/>
-                    </a:solidFill>
-                    <a:lnL>
-                      <a:noFill/>
-                    </a:lnL>
-                    <a:lnR>
-                      <a:noFill/>
-                    </a:lnR>
-                    <a:lnT>
-                      <a:noFill/>
-                    </a:lnT>
-                    <a:lnB>
-                      <a:noFill/>
-                    </a:lnB>
-                  </a:tcPr>
-                </a:tc>
-                <a:tc>
-                  <a:txBody>
-                    <a:bodyPr wrap="square">
-                      <a:noAutofit/>
-                    </a:bodyPr>
-                    <a:lstStyle/>
-                    <a:p>
-                      <a:pPr algn="ctr">
-                        <a:lnSpc>
-                          <a:spcPct val="100000"/>
-                        </a:lnSpc>
-                        <a:spcBef>
-                          <a:spcPts val="0"/>
-                        </a:spcBef>
-                        <a:spcAft>
-                          <a:spcPts val="0"/>
-                        </a:spcAft>
-                      </a:pPr>
-                      <a:r>
-                        <a:rPr sz="1300" b="0">
-                          <a:solidFill>
-                            <a:srgbClr val="1F1F1F"/>
-                          </a:solidFill>
-                          <a:latin typeface="Calibri"/>
-                        </a:rPr>
-                        <a:t>0,10% a.a./PL; mínimo R$ 10.833,33/mês; IPCA positivo anual.</a:t>
-                      </a:r>
-                    </a:p>
-                  </a:txBody>
-                  <a:tcPr marL="91440" marR="91440" marT="41148" marB="41148" anchor="ctr">
-                    <a:solidFill>
-                      <a:srgbClr val="FFFFFF"/>
-                    </a:solidFill>
-                    <a:lnL>
-                      <a:noFill/>
-                    </a:lnL>
-                    <a:lnR>
-                      <a:noFill/>
-                    </a:lnR>
-                    <a:lnT>
-                      <a:noFill/>
-                    </a:lnT>
-                    <a:lnB>
-                      <a:noFill/>
-                    </a:lnB>
-                  </a:tcPr>
-                </a:tc>
-              </a:tr>
-              <a:tr h="283464">
-                <a:tc>
-                  <a:txBody>
-                    <a:bodyPr wrap="square">
-                      <a:noAutofit/>
-                    </a:bodyPr>
-                    <a:lstStyle/>
-                    <a:p>
-                      <a:pPr algn="l">
-                        <a:lnSpc>
-                          <a:spcPct val="100000"/>
-                        </a:lnSpc>
-                        <a:spcBef>
-                          <a:spcPts val="0"/>
-                        </a:spcBef>
-                        <a:spcAft>
-                          <a:spcPts val="0"/>
-                        </a:spcAft>
-                      </a:pPr>
-                      <a:r>
-                        <a:rPr sz="1300" b="1">
-                          <a:solidFill>
-                            <a:srgbClr val="1F1F1F"/>
-                          </a:solidFill>
-                          <a:latin typeface="Calibri"/>
-                        </a:rPr>
-                        <a:t>Gestão</a:t>
-                      </a:r>
-                    </a:p>
-                  </a:txBody>
-                  <a:tcPr marL="91440" marR="91440" marT="41148" marB="41148" anchor="ctr">
-                    <a:solidFill>
-                      <a:srgbClr val="FFFFFF"/>
-                    </a:solidFill>
-                    <a:lnL>
-                      <a:noFill/>
-                    </a:lnL>
-                    <a:lnR>
-                      <a:noFill/>
-                    </a:lnR>
-                    <a:lnT>
-                      <a:noFill/>
-                    </a:lnT>
-                    <a:lnB>
-                      <a:noFill/>
-                    </a:lnB>
-                  </a:tcPr>
-                </a:tc>
-                <a:tc>
-                  <a:txBody>
-                    <a:bodyPr wrap="square">
-                      <a:noAutofit/>
-                    </a:bodyPr>
-                    <a:lstStyle/>
-                    <a:p>
-                      <a:pPr algn="ctr">
-                        <a:lnSpc>
-                          <a:spcPct val="100000"/>
-                        </a:lnSpc>
-                        <a:spcBef>
-                          <a:spcPts val="0"/>
-                        </a:spcBef>
-                        <a:spcAft>
-                          <a:spcPts val="0"/>
-                        </a:spcAft>
-                      </a:pPr>
-                      <a:r>
-                        <a:rPr sz="1300" b="0">
-                          <a:solidFill>
-                            <a:srgbClr val="1F1F1F"/>
-                          </a:solidFill>
-                          <a:latin typeface="Calibri"/>
-                        </a:rPr>
-                        <a:t>0,20% a.a./PL; mínimo R$ 18,5 mil/mês; IPCA positivo anual.</a:t>
-                      </a:r>
-                    </a:p>
-                  </a:txBody>
-                  <a:tcPr marL="91440" marR="91440" marT="41148" marB="41148" anchor="ctr">
-                    <a:solidFill>
-                      <a:srgbClr val="FFFFFF"/>
-                    </a:solidFill>
-                    <a:lnL>
-                      <a:noFill/>
-                    </a:lnL>
-                    <a:lnR>
-                      <a:noFill/>
-                    </a:lnR>
-                    <a:lnT>
-                      <a:noFill/>
-                    </a:lnT>
-                    <a:lnB>
-                      <a:noFill/>
-                    </a:lnB>
-                  </a:tcPr>
-                </a:tc>
-              </a:tr>
-              <a:tr h="283464">
-                <a:tc>
-                  <a:txBody>
-                    <a:bodyPr wrap="square">
-                      <a:noAutofit/>
-                    </a:bodyPr>
-                    <a:lstStyle/>
-                    <a:p>
-                      <a:pPr algn="l">
-                        <a:lnSpc>
-                          <a:spcPct val="100000"/>
-                        </a:lnSpc>
-                        <a:spcBef>
-                          <a:spcPts val="0"/>
-                        </a:spcBef>
-                        <a:spcAft>
-                          <a:spcPts val="0"/>
-                        </a:spcAft>
-                      </a:pPr>
-                      <a:r>
-                        <a:rPr sz="1300" b="1">
-                          <a:solidFill>
-                            <a:srgbClr val="1F1F1F"/>
-                          </a:solidFill>
-                          <a:latin typeface="Calibri"/>
-                        </a:rPr>
-                        <a:t>Custódia</a:t>
-                      </a:r>
-                    </a:p>
-                  </a:txBody>
-                  <a:tcPr marL="91440" marR="91440" marT="41148" marB="41148" anchor="ctr">
-                    <a:solidFill>
-                      <a:srgbClr val="FFFFFF"/>
-                    </a:solidFill>
-                    <a:lnL>
-                      <a:noFill/>
-                    </a:lnL>
-                    <a:lnR>
-                      <a:noFill/>
-                    </a:lnR>
-                    <a:lnT>
-                      <a:noFill/>
-                    </a:lnT>
-                    <a:lnB w="6350">
-                      <a:solidFill>
-                        <a:srgbClr val="D9DEE5"/>
-                      </a:solidFill>
-                    </a:lnB>
-                  </a:tcPr>
-                </a:tc>
-                <a:tc>
-                  <a:txBody>
-                    <a:bodyPr wrap="square">
-                      <a:noAutofit/>
-                    </a:bodyPr>
-                    <a:lstStyle/>
-                    <a:p>
-                      <a:pPr algn="ctr">
-                        <a:lnSpc>
-                          <a:spcPct val="100000"/>
-                        </a:lnSpc>
-                        <a:spcBef>
-                          <a:spcPts val="0"/>
-                        </a:spcBef>
-                        <a:spcAft>
-                          <a:spcPts val="0"/>
-                        </a:spcAft>
-                      </a:pPr>
-                      <a:r>
-                        <a:rPr sz="1300" b="0">
-                          <a:solidFill>
-                            <a:srgbClr val="1F1F1F"/>
-                          </a:solidFill>
-                          <a:latin typeface="Calibri"/>
-                        </a:rPr>
-                        <a:t>0,02% a.a./PL; mínimo R$ 2.166,67/mês; IPCA positivo anual.</a:t>
-                      </a:r>
-                    </a:p>
-                  </a:txBody>
-                  <a:tcPr marL="91440" marR="91440" marT="41148" marB="41148" anchor="ctr">
-                    <a:solidFill>
-                      <a:srgbClr val="FFFFFF"/>
-                    </a:solidFill>
-                    <a:lnL>
-                      <a:noFill/>
-                    </a:lnL>
-                    <a:lnR>
-                      <a:noFill/>
-                    </a:lnR>
-                    <a:lnT>
-                      <a:noFill/>
-                    </a:lnT>
-                    <a:lnB w="6350">
-                      <a:solidFill>
-                        <a:srgbClr val="D9DEE5"/>
-                      </a:solidFill>
-                    </a:lnB>
-                  </a:tcPr>
-                </a:tc>
-              </a:tr>
-            </a:tbl>
-          </a:graphicData>
-        </a:graphic>
-      </p:graphicFrame>
-      <p:sp>
-        <p:nvSpPr>
-          <p:cNvPr id="4" name="TextBox 3"/>
-          <p:cNvSpPr txBox="1"/>
-          <p:nvPr/>
-        </p:nvSpPr>
-        <p:spPr>
-          <a:xfrm>
-            <a:off x="438912" y="6428232"/>
-            <a:ext cx="10399471" cy="164592"/>
-          </a:xfrm>
-          <a:prstGeom prst="rect">
-            <a:avLst/>
-          </a:prstGeom>
-          <a:noFill/>
-        </p:spPr>
-        <p:txBody>
-          <a:bodyPr wrap="square" lIns="0" rIns="0" tIns="0" bIns="0">
-            <a:noAutofit/>
-          </a:bodyPr>
-          <a:lstStyle/>
-          <a:p>
-            <a:pPr algn="l"/>
-            <a:r>
-              <a:rPr sz="850" b="0">
-                <a:solidFill>
-                  <a:srgbClr val="6B7280"/>
-                </a:solidFill>
-                <a:latin typeface="Calibri"/>
-              </a:rPr>
-              <a:t>Leitura documental: 07/10/2026. Fontes e referências nas notas do slide.</a:t>
-            </a:r>
-          </a:p>
-        </p:txBody>
-      </p:sp>
-      <p:sp>
-        <p:nvSpPr>
-          <p:cNvPr id="5" name="TextBox 4"/>
-          <p:cNvSpPr txBox="1"/>
-          <p:nvPr/>
-        </p:nvSpPr>
-        <p:spPr>
-          <a:xfrm>
-            <a:off x="11112703" y="6428232"/>
-            <a:ext cx="640080" cy="164592"/>
-          </a:xfrm>
-          <a:prstGeom prst="rect">
-            <a:avLst/>
-          </a:prstGeom>
-          <a:noFill/>
-        </p:spPr>
-        <p:txBody>
-          <a:bodyPr wrap="square" lIns="0" rIns="0" tIns="0" bIns="0">
-            <a:noAutofit/>
-          </a:bodyPr>
-          <a:lstStyle/>
-          <a:p>
-            <a:pPr algn="r"/>
-            <a:r>
-              <a:rPr sz="850" b="0">
-                <a:solidFill>
-                  <a:srgbClr val="6B7280"/>
-                </a:solidFill>
-                <a:latin typeface="Calibri"/>
-              </a:rPr>
-              <a:t>6/7</a:t>
-            </a:r>
-          </a:p>
-        </p:txBody>
-      </p:sp>
-    </p:spTree>
-  </p:cSld>
-  <p:clrMapOvr>
-    <a:masterClrMapping/>
-  </p:clrMapOvr>
-</p:sld>
-</file>
-
-<file path=ppt/slides/slide7.xml><?xml version="1.0" encoding="utf-8"?>
-<p:sld xmlns:a="http://schemas.openxmlformats.org/drawingml/2006/main" xmlns:p="http://schemas.openxmlformats.org/presentationml/2006/main" xmlns:r="http://schemas.openxmlformats.org/officeDocument/2006/relationships">
-  <p:cSld>
-    <p:bg>
-      <p:bgPr>
-        <a:solidFill>
-          <a:srgbClr val="FFFFFF"/>
-        </a:solidFill>
-        <a:effectLst/>
-      </p:bgPr>
-    </p:bg>
-    <p:spTree>
-      <p:nvGrpSpPr>
-        <p:cNvPr id="1" name=""/>
-        <p:cNvGrpSpPr/>
-        <p:nvPr/>
-      </p:nvGrpSpPr>
-      <p:grpSpPr/>
-      <p:sp>
-        <p:nvSpPr>
-          <p:cNvPr id="2" name="TextBox 1"/>
-          <p:cNvSpPr txBox="1"/>
-          <p:nvPr/>
-        </p:nvSpPr>
-        <p:spPr>
-          <a:xfrm>
-            <a:off x="438912" y="292608"/>
-            <a:ext cx="11313871" cy="557784"/>
-          </a:xfrm>
-          <a:prstGeom prst="rect">
-            <a:avLst/>
-          </a:prstGeom>
-          <a:noFill/>
-        </p:spPr>
-        <p:txBody>
-          <a:bodyPr wrap="square" lIns="0" rIns="0" tIns="0" bIns="0">
-            <a:noAutofit/>
-          </a:bodyPr>
-          <a:lstStyle/>
-          <a:p>
-            <a:pPr algn="l"/>
-            <a:r>
-              <a:rPr sz="2300" b="1">
-                <a:solidFill>
-                  <a:srgbClr val="EC7000"/>
-                </a:solidFill>
-                <a:latin typeface="Calibri"/>
-              </a:rPr>
-              <a:t>Curadoria FIDC Solfacil VI – Monitoramento IME e controles documentais</a:t>
-            </a:r>
-          </a:p>
-        </p:txBody>
-      </p:sp>
-      <p:graphicFrame>
-        <p:nvGraphicFramePr>
-          <p:cNvPr id="3" name="Table 2"/>
-          <p:cNvGraphicFramePr>
-            <a:graphicFrameLocks noGrp="1"/>
-          </p:cNvGraphicFramePr>
-          <p:nvPr/>
-        </p:nvGraphicFramePr>
-        <p:xfrm>
-          <a:off x="438912" y="932688"/>
-          <a:ext cx="11313871" cy="2089404"/>
-        </p:xfrm>
-        <a:graphic>
-          <a:graphicData uri="http://schemas.openxmlformats.org/drawingml/2006/table">
-            <a:tbl>
-              <a:tblPr>
-                <a:tableStyleId>{5C22544A-7EE6-4342-B048-85BDC9FD1C3A}</a:tableStyleId>
-              </a:tblPr>
-              <a:tblGrid>
-                <a:gridCol w="2331720"/>
-                <a:gridCol w="8982151"/>
-              </a:tblGrid>
-              <a:tr h="393192">
-                <a:tc>
-                  <a:txBody>
-                    <a:bodyPr wrap="square">
-                      <a:noAutofit/>
-                    </a:bodyPr>
-                    <a:lstStyle/>
-                    <a:p>
-                      <a:pPr algn="l">
-                        <a:lnSpc>
-                          <a:spcPct val="100000"/>
-                        </a:lnSpc>
-                        <a:spcBef>
-                          <a:spcPts val="0"/>
-                        </a:spcBef>
-                        <a:spcAft>
-                          <a:spcPts val="0"/>
-                        </a:spcAft>
-                      </a:pPr>
-                      <a:r>
-                        <a:rPr sz="1300" b="1">
-                          <a:solidFill>
-                            <a:srgbClr val="1F1F1F"/>
-                          </a:solidFill>
-                          <a:latin typeface="Calibri"/>
-                        </a:rPr>
-                        <a:t>Critério</a:t>
-                      </a:r>
-                    </a:p>
-                  </a:txBody>
-                  <a:tcPr marL="91440" marR="91440" marT="41148" marB="41148" anchor="ctr">
-                    <a:solidFill>
-                      <a:srgbClr val="EC7000"/>
-                    </a:solidFill>
-                    <a:lnL>
-                      <a:noFill/>
-                    </a:lnL>
-                    <a:lnR>
-                      <a:noFill/>
-                    </a:lnR>
-                    <a:lnT>
-                      <a:noFill/>
-                    </a:lnT>
-                    <a:lnB w="6350">
-                      <a:solidFill>
-                        <a:srgbClr val="D9DEE5"/>
-                      </a:solidFill>
-                    </a:lnB>
-                  </a:tcPr>
-                </a:tc>
-                <a:tc>
-                  <a:txBody>
-                    <a:bodyPr wrap="square">
-                      <a:noAutofit/>
-                    </a:bodyPr>
-                    <a:lstStyle/>
-                    <a:p>
-                      <a:pPr algn="ctr">
-                        <a:lnSpc>
-                          <a:spcPct val="100000"/>
-                        </a:lnSpc>
-                        <a:spcBef>
-                          <a:spcPts val="0"/>
-                        </a:spcBef>
-                        <a:spcAft>
-                          <a:spcPts val="0"/>
-                        </a:spcAft>
-                      </a:pPr>
-                      <a:r>
-                        <a:rPr sz="1300" b="1">
-                          <a:solidFill>
-                            <a:srgbClr val="1F1F1F"/>
-                          </a:solidFill>
-                          <a:latin typeface="Calibri"/>
-                        </a:rPr>
-                        <a:t>Solfácil VI</a:t>
-                      </a:r>
-                    </a:p>
-                  </a:txBody>
-                  <a:tcPr marL="91440" marR="91440" marT="41148" marB="41148" anchor="ctr">
-                    <a:solidFill>
-                      <a:srgbClr val="EC7000"/>
-                    </a:solidFill>
-                    <a:lnL>
-                      <a:noFill/>
-                    </a:lnL>
-                    <a:lnR>
-                      <a:noFill/>
-                    </a:lnR>
-                    <a:lnT>
-                      <a:noFill/>
-                    </a:lnT>
-                    <a:lnB w="6350">
-                      <a:solidFill>
-                        <a:srgbClr val="D9DEE5"/>
-                      </a:solidFill>
-                    </a:lnB>
-                  </a:tcPr>
-                </a:tc>
-              </a:tr>
-              <a:tr h="470916">
-                <a:tc>
-                  <a:txBody>
-                    <a:bodyPr wrap="square">
-                      <a:noAutofit/>
-                    </a:bodyPr>
-                    <a:lstStyle/>
-                    <a:p>
-                      <a:pPr algn="l">
-                        <a:lnSpc>
-                          <a:spcPct val="100000"/>
-                        </a:lnSpc>
-                        <a:spcBef>
-                          <a:spcPts val="0"/>
-                        </a:spcBef>
-                        <a:spcAft>
-                          <a:spcPts val="0"/>
-                        </a:spcAft>
-                      </a:pPr>
-                      <a:r>
-                        <a:rPr sz="1300" b="1">
-                          <a:solidFill>
-                            <a:srgbClr val="1F1F1F"/>
-                          </a:solidFill>
-                          <a:latin typeface="Calibri"/>
-                        </a:rPr>
-                        <a:t>Alocação/subordinação</a:t>
-                      </a:r>
-                    </a:p>
-                    <a:p>
-                      <a:pPr algn="l">
-                        <a:lnSpc>
-                          <a:spcPct val="100000"/>
-                        </a:lnSpc>
-                        <a:spcBef>
-                          <a:spcPts val="0"/>
-                        </a:spcBef>
-                        <a:spcAft>
-                          <a:spcPts val="0"/>
-                        </a:spcAft>
-                      </a:pPr>
-                      <a:r>
-                        <a:rPr sz="1300" b="1">
-                          <a:solidFill>
-                            <a:srgbClr val="1F1F1F"/>
-                          </a:solidFill>
-                          <a:latin typeface="Calibri"/>
-                        </a:rPr>
-                        <a:t>IME</a:t>
-                      </a:r>
-                    </a:p>
-                  </a:txBody>
-                  <a:tcPr marL="91440" marR="91440" marT="41148" marB="41148" anchor="ctr">
-                    <a:solidFill>
-                      <a:srgbClr val="FFFFFF"/>
-                    </a:solidFill>
-                    <a:lnL>
-                      <a:noFill/>
-                    </a:lnL>
-                    <a:lnR>
-                      <a:noFill/>
-                    </a:lnR>
-                    <a:lnT>
-                      <a:noFill/>
-                    </a:lnT>
-                    <a:lnB>
-                      <a:noFill/>
-                    </a:lnB>
-                  </a:tcPr>
-                </a:tc>
-                <a:tc>
-                  <a:txBody>
-                    <a:bodyPr wrap="square">
-                      <a:noAutofit/>
-                    </a:bodyPr>
-                    <a:lstStyle/>
-                    <a:p>
-                      <a:pPr algn="ctr">
-                        <a:lnSpc>
-                          <a:spcPct val="100000"/>
-                        </a:lnSpc>
-                        <a:spcBef>
-                          <a:spcPts val="0"/>
-                        </a:spcBef>
-                        <a:spcAft>
-                          <a:spcPts val="0"/>
-                        </a:spcAft>
-                      </a:pPr>
-                      <a:r>
-                        <a:rPr sz="1300" b="0">
-                          <a:solidFill>
-                            <a:srgbClr val="1F1F1F"/>
-                          </a:solidFill>
-                          <a:latin typeface="Calibri"/>
-                        </a:rPr>
-                        <a:t>DC/PL e cotas subordinadas/PL: cálculo agregado com validação de classes e do denominador.</a:t>
-                      </a:r>
-                    </a:p>
-                  </a:txBody>
-                  <a:tcPr marL="91440" marR="91440" marT="41148" marB="41148" anchor="ctr">
-                    <a:solidFill>
-                      <a:srgbClr val="FFFFFF"/>
-                    </a:solidFill>
-                    <a:lnL>
-                      <a:noFill/>
-                    </a:lnL>
-                    <a:lnR>
-                      <a:noFill/>
-                    </a:lnR>
-                    <a:lnT>
-                      <a:noFill/>
-                    </a:lnT>
-                    <a:lnB>
-                      <a:noFill/>
-                    </a:lnB>
-                  </a:tcPr>
-                </a:tc>
-              </a:tr>
-              <a:tr h="470916">
-                <a:tc>
-                  <a:txBody>
-                    <a:bodyPr wrap="square">
-                      <a:noAutofit/>
-                    </a:bodyPr>
-                    <a:lstStyle/>
-                    <a:p>
-                      <a:pPr algn="l">
-                        <a:lnSpc>
-                          <a:spcPct val="100000"/>
-                        </a:lnSpc>
-                        <a:spcBef>
-                          <a:spcPts val="0"/>
-                        </a:spcBef>
-                        <a:spcAft>
-                          <a:spcPts val="0"/>
-                        </a:spcAft>
-                      </a:pPr>
-                      <a:r>
-                        <a:rPr sz="1300" b="1">
-                          <a:solidFill>
-                            <a:srgbClr val="1F1F1F"/>
-                          </a:solidFill>
-                          <a:latin typeface="Calibri"/>
-                        </a:rPr>
-                        <a:t>Inadimplência/PDD IME</a:t>
-                      </a:r>
-                    </a:p>
-                  </a:txBody>
-                  <a:tcPr marL="91440" marR="91440" marT="41148" marB="41148" anchor="ctr">
-                    <a:solidFill>
-                      <a:srgbClr val="FFFFFF"/>
-                    </a:solidFill>
-                    <a:lnL>
-                      <a:noFill/>
-                    </a:lnL>
-                    <a:lnR>
-                      <a:noFill/>
-                    </a:lnR>
-                    <a:lnT>
-                      <a:noFill/>
-                    </a:lnT>
-                    <a:lnB>
-                      <a:noFill/>
-                    </a:lnB>
-                  </a:tcPr>
-                </a:tc>
-                <a:tc>
-                  <a:txBody>
-                    <a:bodyPr wrap="square">
-                      <a:noAutofit/>
-                    </a:bodyPr>
-                    <a:lstStyle/>
-                    <a:p>
-                      <a:pPr algn="ctr">
-                        <a:lnSpc>
-                          <a:spcPct val="100000"/>
-                        </a:lnSpc>
-                        <a:spcBef>
-                          <a:spcPts val="0"/>
-                        </a:spcBef>
-                        <a:spcAft>
-                          <a:spcPts val="0"/>
-                        </a:spcAft>
-                      </a:pPr>
-                      <a:r>
-                        <a:rPr sz="1300" b="0">
-                          <a:solidFill>
-                            <a:srgbClr val="1F1F1F"/>
-                          </a:solidFill>
-                          <a:latin typeface="Calibri"/>
-                        </a:rPr>
-                        <a:t>Over 30/60/90/180/crédito e PDD/crédito: proxies agregados; gatilhos contratuais exigem fórmula</a:t>
-                      </a:r>
-                    </a:p>
-                    <a:p>
-                      <a:pPr algn="ctr">
-                        <a:lnSpc>
-                          <a:spcPct val="100000"/>
-                        </a:lnSpc>
-                        <a:spcBef>
-                          <a:spcPts val="0"/>
-                        </a:spcBef>
-                        <a:spcAft>
-                          <a:spcPts val="0"/>
-                        </a:spcAft>
-                      </a:pPr>
-                      <a:r>
-                        <a:rPr sz="1300" b="0">
-                          <a:solidFill>
-                            <a:srgbClr val="1F1F1F"/>
-                          </a:solidFill>
-                          <a:latin typeface="Calibri"/>
-                        </a:rPr>
-                        <a:t>própria.</a:t>
-                      </a:r>
-                    </a:p>
-                  </a:txBody>
-                  <a:tcPr marL="91440" marR="91440" marT="41148" marB="41148" anchor="ctr">
-                    <a:solidFill>
-                      <a:srgbClr val="FFFFFF"/>
-                    </a:solidFill>
-                    <a:lnL>
-                      <a:noFill/>
-                    </a:lnL>
-                    <a:lnR>
-                      <a:noFill/>
-                    </a:lnR>
-                    <a:lnT>
-                      <a:noFill/>
-                    </a:lnT>
-                    <a:lnB>
-                      <a:noFill/>
-                    </a:lnB>
-                  </a:tcPr>
-                </a:tc>
-              </a:tr>
-              <a:tr h="470916">
-                <a:tc>
-                  <a:txBody>
-                    <a:bodyPr wrap="square">
-                      <a:noAutofit/>
-                    </a:bodyPr>
-                    <a:lstStyle/>
-                    <a:p>
-                      <a:pPr algn="l">
-                        <a:lnSpc>
-                          <a:spcPct val="100000"/>
-                        </a:lnSpc>
-                        <a:spcBef>
-                          <a:spcPts val="0"/>
-                        </a:spcBef>
-                        <a:spcAft>
-                          <a:spcPts val="0"/>
-                        </a:spcAft>
-                      </a:pPr>
-                      <a:r>
-                        <a:rPr sz="1300" b="1">
-                          <a:solidFill>
-                            <a:srgbClr val="1F1F1F"/>
-                          </a:solidFill>
-                          <a:latin typeface="Calibri"/>
-                        </a:rPr>
-                        <a:t>Controles documentais</a:t>
-                      </a:r>
-                    </a:p>
-                  </a:txBody>
-                  <a:tcPr marL="91440" marR="91440" marT="41148" marB="41148" anchor="ctr">
-                    <a:solidFill>
-                      <a:srgbClr val="FFFFFF"/>
-                    </a:solidFill>
-                    <a:lnL>
-                      <a:noFill/>
-                    </a:lnL>
-                    <a:lnR>
-                      <a:noFill/>
-                    </a:lnR>
-                    <a:lnT>
-                      <a:noFill/>
-                    </a:lnT>
-                    <a:lnB>
-                      <a:noFill/>
-                    </a:lnB>
-                  </a:tcPr>
-                </a:tc>
-                <a:tc>
-                  <a:txBody>
-                    <a:bodyPr wrap="square">
-                      <a:noAutofit/>
-                    </a:bodyPr>
-                    <a:lstStyle/>
-                    <a:p>
-                      <a:pPr algn="ctr">
-                        <a:lnSpc>
-                          <a:spcPct val="100000"/>
-                        </a:lnSpc>
-                        <a:spcBef>
-                          <a:spcPts val="0"/>
-                        </a:spcBef>
-                        <a:spcAft>
-                          <a:spcPts val="0"/>
-                        </a:spcAft>
-                      </a:pPr>
-                      <a:r>
-                        <a:rPr sz="1300" b="0">
-                          <a:solidFill>
-                            <a:srgbClr val="1F1F1F"/>
-                          </a:solidFill>
-                          <a:latin typeface="Calibri"/>
-                        </a:rPr>
-                        <a:t>Elegibilidade, concentração individual, lastro, finalidade do hedge e troca de prestadores exigem</a:t>
-                      </a:r>
-                    </a:p>
-                    <a:p>
-                      <a:pPr algn="ctr">
-                        <a:lnSpc>
-                          <a:spcPct val="100000"/>
-                        </a:lnSpc>
-                        <a:spcBef>
-                          <a:spcPts val="0"/>
-                        </a:spcBef>
-                        <a:spcAft>
-                          <a:spcPts val="0"/>
-                        </a:spcAft>
-                      </a:pPr>
-                      <a:r>
-                        <a:rPr sz="1300" b="0">
-                          <a:solidFill>
-                            <a:srgbClr val="1F1F1F"/>
-                          </a:solidFill>
-                          <a:latin typeface="Calibri"/>
-                        </a:rPr>
-                        <a:t>controle documental.</a:t>
-                      </a:r>
-                    </a:p>
-                  </a:txBody>
-                  <a:tcPr marL="91440" marR="91440" marT="41148" marB="41148" anchor="ctr">
-                    <a:solidFill>
-                      <a:srgbClr val="FFFFFF"/>
-                    </a:solidFill>
-                    <a:lnL>
-                      <a:noFill/>
-                    </a:lnL>
-                    <a:lnR>
-                      <a:noFill/>
-                    </a:lnR>
-                    <a:lnT>
-                      <a:noFill/>
-                    </a:lnT>
-                    <a:lnB>
-                      <a:noFill/>
-                    </a:lnB>
-                  </a:tcPr>
-                </a:tc>
-              </a:tr>
-              <a:tr h="283464">
-                <a:tc>
-                  <a:txBody>
-                    <a:bodyPr wrap="square">
-                      <a:noAutofit/>
-                    </a:bodyPr>
-                    <a:lstStyle/>
-                    <a:p>
-                      <a:pPr algn="l">
-                        <a:lnSpc>
-                          <a:spcPct val="100000"/>
-                        </a:lnSpc>
-                        <a:spcBef>
-                          <a:spcPts val="0"/>
-                        </a:spcBef>
-                        <a:spcAft>
-                          <a:spcPts val="0"/>
-                        </a:spcAft>
-                      </a:pPr>
-                      <a:r>
-                        <a:rPr sz="1300" b="1">
-                          <a:solidFill>
-                            <a:srgbClr val="1F1F1F"/>
-                          </a:solidFill>
-                          <a:latin typeface="Calibri"/>
-                        </a:rPr>
-                        <a:t>Competência IME</a:t>
-                      </a:r>
-                    </a:p>
-                  </a:txBody>
-                  <a:tcPr marL="91440" marR="91440" marT="41148" marB="41148" anchor="ctr">
-                    <a:solidFill>
-                      <a:srgbClr val="FFFFFF"/>
-                    </a:solidFill>
-                    <a:lnL>
-                      <a:noFill/>
-                    </a:lnL>
-                    <a:lnR>
-                      <a:noFill/>
-                    </a:lnR>
-                    <a:lnT>
-                      <a:noFill/>
-                    </a:lnT>
-                    <a:lnB w="6350">
-                      <a:solidFill>
-                        <a:srgbClr val="D9DEE5"/>
-                      </a:solidFill>
-                    </a:lnB>
-                  </a:tcPr>
-                </a:tc>
-                <a:tc>
-                  <a:txBody>
-                    <a:bodyPr wrap="square">
-                      <a:noAutofit/>
-                    </a:bodyPr>
-                    <a:lstStyle/>
-                    <a:p>
-                      <a:pPr algn="ctr">
-                        <a:lnSpc>
-                          <a:spcPct val="100000"/>
-                        </a:lnSpc>
-                        <a:spcBef>
-                          <a:spcPts val="0"/>
-                        </a:spcBef>
-                        <a:spcAft>
-                          <a:spcPts val="0"/>
-                        </a:spcAft>
-                      </a:pPr>
-                      <a:r>
-                        <a:rPr sz="1300" b="0">
-                          <a:solidFill>
-                            <a:srgbClr val="1F1F1F"/>
-                          </a:solidFill>
-                          <a:latin typeface="Calibri"/>
-                        </a:rPr>
-                        <a:t>Sem competência IME carregada em cache local</a:t>
+                        <a:t>-</a:t>
                       </a:r>
                     </a:p>
                   </a:txBody>
